--- a/public/fun/pack/pptx/wedding/결혼식_18_식순중심_바닷가등대.pptx
+++ b/public/fun/pack/pptx/wedding/결혼식_18_식순중심_바닷가등대.pptx
@@ -3286,14 +3286,6 @@
 <file path=ppt/slides/slide1.xml><?xml version="1.0" encoding="utf-8"?>
 <p:sld xmlns:a="http://schemas.openxmlformats.org/drawingml/2006/main" xmlns:p="http://schemas.openxmlformats.org/presentationml/2006/main" xmlns:r="http://schemas.openxmlformats.org/officeDocument/2006/relationships">
   <p:cSld>
-    <p:bg>
-      <p:bgPr>
-        <a:solidFill>
-          <a:srgbClr val="FFFFFF"/>
-        </a:solidFill>
-        <a:effectLst/>
-      </p:bgPr>
-    </p:bg>
     <p:spTree>
       <p:nvGrpSpPr>
         <p:cNvPr id="1" name=""/>
@@ -3301,151 +3293,30 @@
         <p:nvPr/>
       </p:nvGrpSpPr>
       <p:grpSpPr/>
-      <p:sp>
-        <p:nvSpPr>
-          <p:cNvPr id="3" name="장식"/>
-          <p:cNvSpPr/>
+      <p:pic>
+        <p:nvPicPr>
+          <p:cNvPr id="3" name="표지 그림" descr="wedding-18.jpg"/>
+          <p:cNvPicPr>
+            <a:picLocks noChangeAspect="1"/>
+          </p:cNvPicPr>
           <p:nvPr/>
-        </p:nvSpPr>
-        <p:spPr>
-          <a:xfrm>
-            <a:off x="0" y="2057400"/>
-            <a:ext cx="10241023" cy="1828800"/>
-          </a:xfrm>
-          <a:prstGeom prst="homePlate">
-            <a:avLst/>
-          </a:prstGeom>
-          <a:solidFill>
-            <a:srgbClr val="25799D"/>
-          </a:solidFill>
-          <a:ln>
-            <a:noFill/>
-          </a:ln>
-        </p:spPr>
-        <p:txBody>
-          <a:bodyPr rtlCol="0" anchor="ctr"/>
-          <a:lstStyle/>
-          <a:p>
-            <a:pPr algn="ctr"/>
-          </a:p>
-        </p:txBody>
-      </p:sp>
-      <p:sp>
-        <p:nvSpPr>
-          <p:cNvPr id="4" name="장식"/>
-          <p:cNvSpPr/>
-          <p:nvPr/>
-        </p:nvSpPr>
-        <p:spPr>
-          <a:xfrm>
-            <a:off x="0" y="3886200"/>
-            <a:ext cx="9509522" cy="64008"/>
+        </p:nvPicPr>
+        <p:blipFill>
+          <a:blip r:embed="rId2"/>
+          <a:stretch>
+            <a:fillRect/>
+          </a:stretch>
+        </p:blipFill>
+        <p:spPr>
+          <a:xfrm>
+            <a:off x="0" y="0"/>
+            <a:ext cx="12191695" cy="6858000"/>
           </a:xfrm>
           <a:prstGeom prst="rect">
             <a:avLst/>
           </a:prstGeom>
-          <a:solidFill>
-            <a:srgbClr val="913B4C"/>
-          </a:solidFill>
-          <a:ln>
-            <a:noFill/>
-          </a:ln>
-        </p:spPr>
-        <p:txBody>
-          <a:bodyPr rtlCol="0" anchor="ctr"/>
-          <a:lstStyle/>
-          <a:p>
-            <a:pPr algn="ctr"/>
-          </a:p>
-        </p:txBody>
-      </p:sp>
-      <p:sp>
-        <p:nvSpPr>
-          <p:cNvPr id="5" name="장식"/>
-          <p:cNvSpPr/>
-          <p:nvPr/>
-        </p:nvSpPr>
-        <p:spPr>
-          <a:xfrm>
-            <a:off x="9329659" y="672084"/>
-            <a:ext cx="2798064" cy="699516"/>
-          </a:xfrm>
-          <a:prstGeom prst="wave">
-            <a:avLst/>
-          </a:prstGeom>
-          <a:solidFill>
-            <a:srgbClr val="CCE9F5"/>
-          </a:solidFill>
-          <a:ln>
-            <a:noFill/>
-          </a:ln>
-        </p:spPr>
-        <p:txBody>
-          <a:bodyPr rtlCol="0" anchor="ctr"/>
-          <a:lstStyle/>
-          <a:p>
-            <a:pPr algn="ctr"/>
-          </a:p>
-        </p:txBody>
-      </p:sp>
-      <p:sp>
-        <p:nvSpPr>
-          <p:cNvPr id="6" name="장식"/>
-          <p:cNvSpPr/>
-          <p:nvPr/>
-        </p:nvSpPr>
-        <p:spPr>
-          <a:xfrm>
-            <a:off x="9329659" y="1278331"/>
-            <a:ext cx="2798064" cy="699516"/>
-          </a:xfrm>
-          <a:prstGeom prst="wave">
-            <a:avLst/>
-          </a:prstGeom>
-          <a:solidFill>
-            <a:srgbClr val="25799D"/>
-          </a:solidFill>
-          <a:ln>
-            <a:noFill/>
-          </a:ln>
-        </p:spPr>
-        <p:txBody>
-          <a:bodyPr rtlCol="0" anchor="ctr"/>
-          <a:lstStyle/>
-          <a:p>
-            <a:pPr algn="ctr"/>
-          </a:p>
-        </p:txBody>
-      </p:sp>
-      <p:sp>
-        <p:nvSpPr>
-          <p:cNvPr id="7" name="장식"/>
-          <p:cNvSpPr/>
-          <p:nvPr/>
-        </p:nvSpPr>
-        <p:spPr>
-          <a:xfrm>
-            <a:off x="9329659" y="1884578"/>
-            <a:ext cx="2798064" cy="699516"/>
-          </a:xfrm>
-          <a:prstGeom prst="wave">
-            <a:avLst/>
-          </a:prstGeom>
-          <a:solidFill>
-            <a:srgbClr val="913B4C"/>
-          </a:solidFill>
-          <a:ln>
-            <a:noFill/>
-          </a:ln>
-        </p:spPr>
-        <p:txBody>
-          <a:bodyPr rtlCol="0" anchor="ctr"/>
-          <a:lstStyle/>
-          <a:p>
-            <a:pPr algn="ctr"/>
-          </a:p>
-        </p:txBody>
-      </p:sp>
+        </p:spPr>
+      </p:pic>
       <p:sp>
         <p:nvSpPr>
           <p:cNvPr id="2" name="Title 1"/>
@@ -3458,8 +3329,8 @@
         </p:nvSpPr>
         <p:spPr>
           <a:xfrm>
-            <a:off x="731501" y="2167128"/>
-            <a:ext cx="8778020" cy="1609344"/>
+            <a:off x="853418" y="2057400"/>
+            <a:ext cx="6095847" cy="1554480"/>
           </a:xfrm>
         </p:spPr>
         <p:txBody>
@@ -3476,24 +3347,24 @@
             <a:r>
               <a:rPr sz="3600" b="1" i="0">
                 <a:solidFill>
-                  <a:srgbClr val="FFFFFF"/>
+                  <a:srgbClr val="11394A"/>
                 </a:solidFill>
               </a:rPr>
-              <a:t>두 사람이 하나 되는 날</a:t>
-            </a:r>
-          </a:p>
-        </p:txBody>
-      </p:sp>
-      <p:sp>
-        <p:nvSpPr>
-          <p:cNvPr id="8" name="한 줄 문구"/>
+              <a:t>저희 결혼합니다</a:t>
+            </a:r>
+          </a:p>
+        </p:txBody>
+      </p:sp>
+      <p:sp>
+        <p:nvSpPr>
+          <p:cNvPr id="4" name="한 줄 문구"/>
           <p:cNvSpPr txBox="1"/>
           <p:nvPr/>
         </p:nvSpPr>
         <p:spPr>
           <a:xfrm>
-            <a:off x="731501" y="4160520"/>
-            <a:ext cx="8534186" cy="822960"/>
+            <a:off x="853418" y="3749039"/>
+            <a:ext cx="6095847" cy="822960"/>
           </a:xfrm>
           <a:prstGeom prst="rect">
             <a:avLst/>
@@ -3517,21 +3388,21 @@
                   <a:srgbClr val="11394A"/>
                 </a:solidFill>
               </a:rPr>
-              <a:t>등대처럼 서로의 길을 밝히겠습니다</a:t>
-            </a:r>
-          </a:p>
-        </p:txBody>
-      </p:sp>
-      <p:sp>
-        <p:nvSpPr>
-          <p:cNvPr id="9" name="안내 문구"/>
+              <a:t>주례 없이 직접 인사드립니다</a:t>
+            </a:r>
+          </a:p>
+        </p:txBody>
+      </p:sp>
+      <p:sp>
+        <p:nvSpPr>
+          <p:cNvPr id="5" name="안내 문구"/>
           <p:cNvSpPr txBox="1"/>
           <p:nvPr/>
         </p:nvSpPr>
         <p:spPr>
           <a:xfrm>
-            <a:off x="731501" y="5029200"/>
-            <a:ext cx="8534186" cy="914400"/>
+            <a:off x="853418" y="4617720"/>
+            <a:ext cx="6095847" cy="914400"/>
           </a:xfrm>
           <a:prstGeom prst="rect">
             <a:avLst/>
@@ -3570,7 +3441,7 @@
                   <a:srgbClr val="666666"/>
                 </a:solidFill>
               </a:rPr>
-              <a:t>2026. 00. 00 · 예식장 이름</a:t>
+              <a:t>2027. 00. 00 · 예식장 이름</a:t>
             </a:r>
           </a:p>
         </p:txBody>
@@ -3632,93 +3503,6 @@
       </p:sp>
       <p:sp>
         <p:nvSpPr>
-          <p:cNvPr id="4" name="장식"/>
-          <p:cNvSpPr/>
-          <p:nvPr/>
-        </p:nvSpPr>
-        <p:spPr>
-          <a:xfrm>
-            <a:off x="10719511" y="475488"/>
-            <a:ext cx="1207008" cy="301752"/>
-          </a:xfrm>
-          <a:prstGeom prst="wave">
-            <a:avLst/>
-          </a:prstGeom>
-          <a:solidFill>
-            <a:srgbClr val="CCE9F5"/>
-          </a:solidFill>
-          <a:ln>
-            <a:noFill/>
-          </a:ln>
-        </p:spPr>
-        <p:txBody>
-          <a:bodyPr rtlCol="0" anchor="ctr"/>
-          <a:lstStyle/>
-          <a:p>
-            <a:pPr algn="ctr"/>
-          </a:p>
-        </p:txBody>
-      </p:sp>
-      <p:sp>
-        <p:nvSpPr>
-          <p:cNvPr id="5" name="장식"/>
-          <p:cNvSpPr/>
-          <p:nvPr/>
-        </p:nvSpPr>
-        <p:spPr>
-          <a:xfrm>
-            <a:off x="10719511" y="737006"/>
-            <a:ext cx="1207008" cy="301752"/>
-          </a:xfrm>
-          <a:prstGeom prst="wave">
-            <a:avLst/>
-          </a:prstGeom>
-          <a:solidFill>
-            <a:srgbClr val="25799D"/>
-          </a:solidFill>
-          <a:ln>
-            <a:noFill/>
-          </a:ln>
-        </p:spPr>
-        <p:txBody>
-          <a:bodyPr rtlCol="0" anchor="ctr"/>
-          <a:lstStyle/>
-          <a:p>
-            <a:pPr algn="ctr"/>
-          </a:p>
-        </p:txBody>
-      </p:sp>
-      <p:sp>
-        <p:nvSpPr>
-          <p:cNvPr id="6" name="장식"/>
-          <p:cNvSpPr/>
-          <p:nvPr/>
-        </p:nvSpPr>
-        <p:spPr>
-          <a:xfrm>
-            <a:off x="10719511" y="998524"/>
-            <a:ext cx="1207008" cy="301752"/>
-          </a:xfrm>
-          <a:prstGeom prst="wave">
-            <a:avLst/>
-          </a:prstGeom>
-          <a:solidFill>
-            <a:srgbClr val="913B4C"/>
-          </a:solidFill>
-          <a:ln>
-            <a:noFill/>
-          </a:ln>
-        </p:spPr>
-        <p:txBody>
-          <a:bodyPr rtlCol="0" anchor="ctr"/>
-          <a:lstStyle/>
-          <a:p>
-            <a:pPr algn="ctr"/>
-          </a:p>
-        </p:txBody>
-      </p:sp>
-      <p:sp>
-        <p:nvSpPr>
           <p:cNvPr id="2" name="Title 1"/>
           <p:cNvSpPr>
             <a:spLocks noGrp="1"/>
@@ -3757,7 +3541,7 @@
       </p:sp>
       <p:sp>
         <p:nvSpPr>
-          <p:cNvPr id="7" name="사진 자리"/>
+          <p:cNvPr id="4" name="사진 자리"/>
           <p:cNvSpPr/>
           <p:nvPr/>
         </p:nvSpPr>
@@ -3803,7 +3587,7 @@
       </p:sp>
       <p:sp>
         <p:nvSpPr>
-          <p:cNvPr id="8" name="TextBox 7"/>
+          <p:cNvPr id="5" name="TextBox 4"/>
           <p:cNvSpPr txBox="1"/>
           <p:nvPr/>
         </p:nvSpPr>
@@ -3841,7 +3625,7 @@
       </p:sp>
       <p:sp>
         <p:nvSpPr>
-          <p:cNvPr id="9" name="TextBox 8"/>
+          <p:cNvPr id="6" name="TextBox 5"/>
           <p:cNvSpPr txBox="1"/>
           <p:nvPr/>
         </p:nvSpPr>
@@ -3909,7 +3693,7 @@
       </p:sp>
       <p:sp>
         <p:nvSpPr>
-          <p:cNvPr id="10" name="사진 자리"/>
+          <p:cNvPr id="7" name="사진 자리"/>
           <p:cNvSpPr/>
           <p:nvPr/>
         </p:nvSpPr>
@@ -3955,7 +3739,7 @@
       </p:sp>
       <p:sp>
         <p:nvSpPr>
-          <p:cNvPr id="11" name="TextBox 10"/>
+          <p:cNvPr id="8" name="TextBox 7"/>
           <p:cNvSpPr txBox="1"/>
           <p:nvPr/>
         </p:nvSpPr>
@@ -3993,7 +3777,7 @@
       </p:sp>
       <p:sp>
         <p:nvSpPr>
-          <p:cNvPr id="12" name="TextBox 11"/>
+          <p:cNvPr id="9" name="TextBox 8"/>
           <p:cNvSpPr txBox="1"/>
           <p:nvPr/>
         </p:nvSpPr>
@@ -4116,93 +3900,6 @@
       </p:sp>
       <p:sp>
         <p:nvSpPr>
-          <p:cNvPr id="4" name="장식"/>
-          <p:cNvSpPr/>
-          <p:nvPr/>
-        </p:nvSpPr>
-        <p:spPr>
-          <a:xfrm>
-            <a:off x="10719511" y="475488"/>
-            <a:ext cx="1207008" cy="301752"/>
-          </a:xfrm>
-          <a:prstGeom prst="wave">
-            <a:avLst/>
-          </a:prstGeom>
-          <a:solidFill>
-            <a:srgbClr val="CCE9F5"/>
-          </a:solidFill>
-          <a:ln>
-            <a:noFill/>
-          </a:ln>
-        </p:spPr>
-        <p:txBody>
-          <a:bodyPr rtlCol="0" anchor="ctr"/>
-          <a:lstStyle/>
-          <a:p>
-            <a:pPr algn="ctr"/>
-          </a:p>
-        </p:txBody>
-      </p:sp>
-      <p:sp>
-        <p:nvSpPr>
-          <p:cNvPr id="5" name="장식"/>
-          <p:cNvSpPr/>
-          <p:nvPr/>
-        </p:nvSpPr>
-        <p:spPr>
-          <a:xfrm>
-            <a:off x="10719511" y="737006"/>
-            <a:ext cx="1207008" cy="301752"/>
-          </a:xfrm>
-          <a:prstGeom prst="wave">
-            <a:avLst/>
-          </a:prstGeom>
-          <a:solidFill>
-            <a:srgbClr val="25799D"/>
-          </a:solidFill>
-          <a:ln>
-            <a:noFill/>
-          </a:ln>
-        </p:spPr>
-        <p:txBody>
-          <a:bodyPr rtlCol="0" anchor="ctr"/>
-          <a:lstStyle/>
-          <a:p>
-            <a:pPr algn="ctr"/>
-          </a:p>
-        </p:txBody>
-      </p:sp>
-      <p:sp>
-        <p:nvSpPr>
-          <p:cNvPr id="6" name="장식"/>
-          <p:cNvSpPr/>
-          <p:nvPr/>
-        </p:nvSpPr>
-        <p:spPr>
-          <a:xfrm>
-            <a:off x="10719511" y="998524"/>
-            <a:ext cx="1207008" cy="301752"/>
-          </a:xfrm>
-          <a:prstGeom prst="wave">
-            <a:avLst/>
-          </a:prstGeom>
-          <a:solidFill>
-            <a:srgbClr val="913B4C"/>
-          </a:solidFill>
-          <a:ln>
-            <a:noFill/>
-          </a:ln>
-        </p:spPr>
-        <p:txBody>
-          <a:bodyPr rtlCol="0" anchor="ctr"/>
-          <a:lstStyle/>
-          <a:p>
-            <a:pPr algn="ctr"/>
-          </a:p>
-        </p:txBody>
-      </p:sp>
-      <p:sp>
-        <p:nvSpPr>
           <p:cNvPr id="2" name="Title 1"/>
           <p:cNvSpPr>
             <a:spLocks noGrp="1"/>
@@ -4241,7 +3938,7 @@
       </p:sp>
       <p:graphicFrame>
         <p:nvGraphicFramePr>
-          <p:cNvPr id="7" name="표"/>
+          <p:cNvPr id="4" name="표"/>
           <p:cNvGraphicFramePr>
             <a:graphicFrameLocks noGrp="1"/>
           </p:cNvGraphicFramePr>
@@ -5163,93 +4860,6 @@
       </p:sp>
       <p:sp>
         <p:nvSpPr>
-          <p:cNvPr id="4" name="장식"/>
-          <p:cNvSpPr/>
-          <p:nvPr/>
-        </p:nvSpPr>
-        <p:spPr>
-          <a:xfrm>
-            <a:off x="10719511" y="475488"/>
-            <a:ext cx="1207008" cy="301752"/>
-          </a:xfrm>
-          <a:prstGeom prst="wave">
-            <a:avLst/>
-          </a:prstGeom>
-          <a:solidFill>
-            <a:srgbClr val="CCE9F5"/>
-          </a:solidFill>
-          <a:ln>
-            <a:noFill/>
-          </a:ln>
-        </p:spPr>
-        <p:txBody>
-          <a:bodyPr rtlCol="0" anchor="ctr"/>
-          <a:lstStyle/>
-          <a:p>
-            <a:pPr algn="ctr"/>
-          </a:p>
-        </p:txBody>
-      </p:sp>
-      <p:sp>
-        <p:nvSpPr>
-          <p:cNvPr id="5" name="장식"/>
-          <p:cNvSpPr/>
-          <p:nvPr/>
-        </p:nvSpPr>
-        <p:spPr>
-          <a:xfrm>
-            <a:off x="10719511" y="737006"/>
-            <a:ext cx="1207008" cy="301752"/>
-          </a:xfrm>
-          <a:prstGeom prst="wave">
-            <a:avLst/>
-          </a:prstGeom>
-          <a:solidFill>
-            <a:srgbClr val="25799D"/>
-          </a:solidFill>
-          <a:ln>
-            <a:noFill/>
-          </a:ln>
-        </p:spPr>
-        <p:txBody>
-          <a:bodyPr rtlCol="0" anchor="ctr"/>
-          <a:lstStyle/>
-          <a:p>
-            <a:pPr algn="ctr"/>
-          </a:p>
-        </p:txBody>
-      </p:sp>
-      <p:sp>
-        <p:nvSpPr>
-          <p:cNvPr id="6" name="장식"/>
-          <p:cNvSpPr/>
-          <p:nvPr/>
-        </p:nvSpPr>
-        <p:spPr>
-          <a:xfrm>
-            <a:off x="10719511" y="998524"/>
-            <a:ext cx="1207008" cy="301752"/>
-          </a:xfrm>
-          <a:prstGeom prst="wave">
-            <a:avLst/>
-          </a:prstGeom>
-          <a:solidFill>
-            <a:srgbClr val="913B4C"/>
-          </a:solidFill>
-          <a:ln>
-            <a:noFill/>
-          </a:ln>
-        </p:spPr>
-        <p:txBody>
-          <a:bodyPr rtlCol="0" anchor="ctr"/>
-          <a:lstStyle/>
-          <a:p>
-            <a:pPr algn="ctr"/>
-          </a:p>
-        </p:txBody>
-      </p:sp>
-      <p:sp>
-        <p:nvSpPr>
           <p:cNvPr id="2" name="Title 1"/>
           <p:cNvSpPr>
             <a:spLocks noGrp="1"/>
@@ -5288,7 +4898,7 @@
       </p:sp>
       <p:sp>
         <p:nvSpPr>
-          <p:cNvPr id="7" name="카드 1"/>
+          <p:cNvPr id="4" name="카드 1"/>
           <p:cNvSpPr/>
           <p:nvPr/>
         </p:nvSpPr>
@@ -5321,7 +4931,7 @@
       </p:sp>
       <p:sp>
         <p:nvSpPr>
-          <p:cNvPr id="8" name="번호 1"/>
+          <p:cNvPr id="5" name="번호 1"/>
           <p:cNvSpPr/>
           <p:nvPr/>
         </p:nvSpPr>
@@ -5364,7 +4974,7 @@
       </p:sp>
       <p:sp>
         <p:nvSpPr>
-          <p:cNvPr id="9" name="TextBox 8"/>
+          <p:cNvPr id="6" name="TextBox 5"/>
           <p:cNvSpPr txBox="1"/>
           <p:nvPr/>
         </p:nvSpPr>
@@ -5402,7 +5012,7 @@
       </p:sp>
       <p:sp>
         <p:nvSpPr>
-          <p:cNvPr id="10" name="TextBox 9"/>
+          <p:cNvPr id="7" name="TextBox 6"/>
           <p:cNvSpPr txBox="1"/>
           <p:nvPr/>
         </p:nvSpPr>
@@ -5440,7 +5050,7 @@
       </p:sp>
       <p:sp>
         <p:nvSpPr>
-          <p:cNvPr id="11" name="카드 2"/>
+          <p:cNvPr id="8" name="카드 2"/>
           <p:cNvSpPr/>
           <p:nvPr/>
         </p:nvSpPr>
@@ -5473,7 +5083,7 @@
       </p:sp>
       <p:sp>
         <p:nvSpPr>
-          <p:cNvPr id="12" name="번호 2"/>
+          <p:cNvPr id="9" name="번호 2"/>
           <p:cNvSpPr/>
           <p:nvPr/>
         </p:nvSpPr>
@@ -5516,7 +5126,7 @@
       </p:sp>
       <p:sp>
         <p:nvSpPr>
-          <p:cNvPr id="13" name="TextBox 12"/>
+          <p:cNvPr id="10" name="TextBox 9"/>
           <p:cNvSpPr txBox="1"/>
           <p:nvPr/>
         </p:nvSpPr>
@@ -5554,7 +5164,7 @@
       </p:sp>
       <p:sp>
         <p:nvSpPr>
-          <p:cNvPr id="14" name="TextBox 13"/>
+          <p:cNvPr id="11" name="TextBox 10"/>
           <p:cNvSpPr txBox="1"/>
           <p:nvPr/>
         </p:nvSpPr>
@@ -5592,7 +5202,7 @@
       </p:sp>
       <p:sp>
         <p:nvSpPr>
-          <p:cNvPr id="15" name="카드 3"/>
+          <p:cNvPr id="12" name="카드 3"/>
           <p:cNvSpPr/>
           <p:nvPr/>
         </p:nvSpPr>
@@ -5625,7 +5235,7 @@
       </p:sp>
       <p:sp>
         <p:nvSpPr>
-          <p:cNvPr id="16" name="번호 3"/>
+          <p:cNvPr id="13" name="번호 3"/>
           <p:cNvSpPr/>
           <p:nvPr/>
         </p:nvSpPr>
@@ -5668,7 +5278,7 @@
       </p:sp>
       <p:sp>
         <p:nvSpPr>
-          <p:cNvPr id="17" name="TextBox 16"/>
+          <p:cNvPr id="14" name="TextBox 13"/>
           <p:cNvSpPr txBox="1"/>
           <p:nvPr/>
         </p:nvSpPr>
@@ -5706,7 +5316,7 @@
       </p:sp>
       <p:sp>
         <p:nvSpPr>
-          <p:cNvPr id="18" name="TextBox 17"/>
+          <p:cNvPr id="15" name="TextBox 14"/>
           <p:cNvSpPr txBox="1"/>
           <p:nvPr/>
         </p:nvSpPr>
@@ -5799,93 +5409,6 @@
       </p:sp>
       <p:sp>
         <p:nvSpPr>
-          <p:cNvPr id="4" name="장식"/>
-          <p:cNvSpPr/>
-          <p:nvPr/>
-        </p:nvSpPr>
-        <p:spPr>
-          <a:xfrm>
-            <a:off x="10719511" y="475488"/>
-            <a:ext cx="1207008" cy="301752"/>
-          </a:xfrm>
-          <a:prstGeom prst="wave">
-            <a:avLst/>
-          </a:prstGeom>
-          <a:solidFill>
-            <a:srgbClr val="CCE9F5"/>
-          </a:solidFill>
-          <a:ln>
-            <a:noFill/>
-          </a:ln>
-        </p:spPr>
-        <p:txBody>
-          <a:bodyPr rtlCol="0" anchor="ctr"/>
-          <a:lstStyle/>
-          <a:p>
-            <a:pPr algn="ctr"/>
-          </a:p>
-        </p:txBody>
-      </p:sp>
-      <p:sp>
-        <p:nvSpPr>
-          <p:cNvPr id="5" name="장식"/>
-          <p:cNvSpPr/>
-          <p:nvPr/>
-        </p:nvSpPr>
-        <p:spPr>
-          <a:xfrm>
-            <a:off x="10719511" y="737006"/>
-            <a:ext cx="1207008" cy="301752"/>
-          </a:xfrm>
-          <a:prstGeom prst="wave">
-            <a:avLst/>
-          </a:prstGeom>
-          <a:solidFill>
-            <a:srgbClr val="25799D"/>
-          </a:solidFill>
-          <a:ln>
-            <a:noFill/>
-          </a:ln>
-        </p:spPr>
-        <p:txBody>
-          <a:bodyPr rtlCol="0" anchor="ctr"/>
-          <a:lstStyle/>
-          <a:p>
-            <a:pPr algn="ctr"/>
-          </a:p>
-        </p:txBody>
-      </p:sp>
-      <p:sp>
-        <p:nvSpPr>
-          <p:cNvPr id="6" name="장식"/>
-          <p:cNvSpPr/>
-          <p:nvPr/>
-        </p:nvSpPr>
-        <p:spPr>
-          <a:xfrm>
-            <a:off x="10719511" y="998524"/>
-            <a:ext cx="1207008" cy="301752"/>
-          </a:xfrm>
-          <a:prstGeom prst="wave">
-            <a:avLst/>
-          </a:prstGeom>
-          <a:solidFill>
-            <a:srgbClr val="913B4C"/>
-          </a:solidFill>
-          <a:ln>
-            <a:noFill/>
-          </a:ln>
-        </p:spPr>
-        <p:txBody>
-          <a:bodyPr rtlCol="0" anchor="ctr"/>
-          <a:lstStyle/>
-          <a:p>
-            <a:pPr algn="ctr"/>
-          </a:p>
-        </p:txBody>
-      </p:sp>
-      <p:sp>
-        <p:nvSpPr>
           <p:cNvPr id="2" name="Title 1"/>
           <p:cNvSpPr>
             <a:spLocks noGrp="1"/>
@@ -5924,7 +5447,7 @@
       </p:sp>
       <p:sp>
         <p:nvSpPr>
-          <p:cNvPr id="7" name="사진 자리"/>
+          <p:cNvPr id="4" name="사진 자리"/>
           <p:cNvSpPr/>
           <p:nvPr/>
         </p:nvSpPr>
@@ -5972,7 +5495,7 @@
       </p:sp>
       <p:sp>
         <p:nvSpPr>
-          <p:cNvPr id="8" name="사진 자리"/>
+          <p:cNvPr id="5" name="사진 자리"/>
           <p:cNvSpPr/>
           <p:nvPr/>
         </p:nvSpPr>
@@ -6020,7 +5543,7 @@
       </p:sp>
       <p:sp>
         <p:nvSpPr>
-          <p:cNvPr id="9" name="사진 자리"/>
+          <p:cNvPr id="6" name="사진 자리"/>
           <p:cNvSpPr/>
           <p:nvPr/>
         </p:nvSpPr>
@@ -6068,7 +5591,7 @@
       </p:sp>
       <p:sp>
         <p:nvSpPr>
-          <p:cNvPr id="10" name="사진 자리"/>
+          <p:cNvPr id="7" name="사진 자리"/>
           <p:cNvSpPr/>
           <p:nvPr/>
         </p:nvSpPr>
@@ -6116,7 +5639,7 @@
       </p:sp>
       <p:sp>
         <p:nvSpPr>
-          <p:cNvPr id="11" name="사진 자리"/>
+          <p:cNvPr id="8" name="사진 자리"/>
           <p:cNvSpPr/>
           <p:nvPr/>
         </p:nvSpPr>
@@ -6164,7 +5687,7 @@
       </p:sp>
       <p:sp>
         <p:nvSpPr>
-          <p:cNvPr id="12" name="사진 자리"/>
+          <p:cNvPr id="9" name="사진 자리"/>
           <p:cNvSpPr/>
           <p:nvPr/>
         </p:nvSpPr>
@@ -6221,14 +5744,6 @@
 <file path=ppt/slides/slide6.xml><?xml version="1.0" encoding="utf-8"?>
 <p:sld xmlns:a="http://schemas.openxmlformats.org/drawingml/2006/main" xmlns:p="http://schemas.openxmlformats.org/presentationml/2006/main" xmlns:r="http://schemas.openxmlformats.org/officeDocument/2006/relationships">
   <p:cSld>
-    <p:bg>
-      <p:bgPr>
-        <a:solidFill>
-          <a:srgbClr val="FFFFFF"/>
-        </a:solidFill>
-        <a:effectLst/>
-      </p:bgPr>
-    </p:bg>
     <p:spTree>
       <p:nvGrpSpPr>
         <p:cNvPr id="1" name=""/>
@@ -6236,151 +5751,30 @@
         <p:nvPr/>
       </p:nvGrpSpPr>
       <p:grpSpPr/>
-      <p:sp>
-        <p:nvSpPr>
-          <p:cNvPr id="3" name="장식"/>
-          <p:cNvSpPr/>
+      <p:pic>
+        <p:nvPicPr>
+          <p:cNvPr id="3" name="표지 그림" descr="wedding-18.jpg"/>
+          <p:cNvPicPr>
+            <a:picLocks noChangeAspect="1"/>
+          </p:cNvPicPr>
           <p:nvPr/>
-        </p:nvSpPr>
-        <p:spPr>
-          <a:xfrm>
-            <a:off x="0" y="2057400"/>
-            <a:ext cx="10241023" cy="1828800"/>
-          </a:xfrm>
-          <a:prstGeom prst="homePlate">
-            <a:avLst/>
-          </a:prstGeom>
-          <a:solidFill>
-            <a:srgbClr val="25799D"/>
-          </a:solidFill>
-          <a:ln>
-            <a:noFill/>
-          </a:ln>
-        </p:spPr>
-        <p:txBody>
-          <a:bodyPr rtlCol="0" anchor="ctr"/>
-          <a:lstStyle/>
-          <a:p>
-            <a:pPr algn="ctr"/>
-          </a:p>
-        </p:txBody>
-      </p:sp>
-      <p:sp>
-        <p:nvSpPr>
-          <p:cNvPr id="4" name="장식"/>
-          <p:cNvSpPr/>
-          <p:nvPr/>
-        </p:nvSpPr>
-        <p:spPr>
-          <a:xfrm>
-            <a:off x="0" y="3886200"/>
-            <a:ext cx="9509522" cy="64008"/>
+        </p:nvPicPr>
+        <p:blipFill>
+          <a:blip r:embed="rId2"/>
+          <a:stretch>
+            <a:fillRect/>
+          </a:stretch>
+        </p:blipFill>
+        <p:spPr>
+          <a:xfrm>
+            <a:off x="0" y="0"/>
+            <a:ext cx="12191695" cy="6858000"/>
           </a:xfrm>
           <a:prstGeom prst="rect">
             <a:avLst/>
           </a:prstGeom>
-          <a:solidFill>
-            <a:srgbClr val="913B4C"/>
-          </a:solidFill>
-          <a:ln>
-            <a:noFill/>
-          </a:ln>
-        </p:spPr>
-        <p:txBody>
-          <a:bodyPr rtlCol="0" anchor="ctr"/>
-          <a:lstStyle/>
-          <a:p>
-            <a:pPr algn="ctr"/>
-          </a:p>
-        </p:txBody>
-      </p:sp>
-      <p:sp>
-        <p:nvSpPr>
-          <p:cNvPr id="5" name="장식"/>
-          <p:cNvSpPr/>
-          <p:nvPr/>
-        </p:nvSpPr>
-        <p:spPr>
-          <a:xfrm>
-            <a:off x="9329659" y="672084"/>
-            <a:ext cx="2798064" cy="699516"/>
-          </a:xfrm>
-          <a:prstGeom prst="wave">
-            <a:avLst/>
-          </a:prstGeom>
-          <a:solidFill>
-            <a:srgbClr val="CCE9F5"/>
-          </a:solidFill>
-          <a:ln>
-            <a:noFill/>
-          </a:ln>
-        </p:spPr>
-        <p:txBody>
-          <a:bodyPr rtlCol="0" anchor="ctr"/>
-          <a:lstStyle/>
-          <a:p>
-            <a:pPr algn="ctr"/>
-          </a:p>
-        </p:txBody>
-      </p:sp>
-      <p:sp>
-        <p:nvSpPr>
-          <p:cNvPr id="6" name="장식"/>
-          <p:cNvSpPr/>
-          <p:nvPr/>
-        </p:nvSpPr>
-        <p:spPr>
-          <a:xfrm>
-            <a:off x="9329659" y="1278331"/>
-            <a:ext cx="2798064" cy="699516"/>
-          </a:xfrm>
-          <a:prstGeom prst="wave">
-            <a:avLst/>
-          </a:prstGeom>
-          <a:solidFill>
-            <a:srgbClr val="25799D"/>
-          </a:solidFill>
-          <a:ln>
-            <a:noFill/>
-          </a:ln>
-        </p:spPr>
-        <p:txBody>
-          <a:bodyPr rtlCol="0" anchor="ctr"/>
-          <a:lstStyle/>
-          <a:p>
-            <a:pPr algn="ctr"/>
-          </a:p>
-        </p:txBody>
-      </p:sp>
-      <p:sp>
-        <p:nvSpPr>
-          <p:cNvPr id="7" name="장식"/>
-          <p:cNvSpPr/>
-          <p:nvPr/>
-        </p:nvSpPr>
-        <p:spPr>
-          <a:xfrm>
-            <a:off x="9329659" y="1884578"/>
-            <a:ext cx="2798064" cy="699516"/>
-          </a:xfrm>
-          <a:prstGeom prst="wave">
-            <a:avLst/>
-          </a:prstGeom>
-          <a:solidFill>
-            <a:srgbClr val="913B4C"/>
-          </a:solidFill>
-          <a:ln>
-            <a:noFill/>
-          </a:ln>
-        </p:spPr>
-        <p:txBody>
-          <a:bodyPr rtlCol="0" anchor="ctr"/>
-          <a:lstStyle/>
-          <a:p>
-            <a:pPr algn="ctr"/>
-          </a:p>
-        </p:txBody>
-      </p:sp>
+        </p:spPr>
+      </p:pic>
       <p:sp>
         <p:nvSpPr>
           <p:cNvPr id="2" name="Title 1"/>
@@ -6393,8 +5787,8 @@
         </p:nvSpPr>
         <p:spPr>
           <a:xfrm>
-            <a:off x="731501" y="2167128"/>
-            <a:ext cx="8778020" cy="1609344"/>
+            <a:off x="853418" y="2057400"/>
+            <a:ext cx="6095847" cy="1554480"/>
           </a:xfrm>
         </p:spPr>
         <p:txBody>
@@ -6411,24 +5805,24 @@
             <a:r>
               <a:rPr sz="3400" b="1" i="0">
                 <a:solidFill>
-                  <a:srgbClr val="FFFFFF"/>
+                  <a:srgbClr val="11394A"/>
                 </a:solidFill>
               </a:rPr>
-              <a:t>함께해 주셔서 감사합니다</a:t>
-            </a:r>
-          </a:p>
-        </p:txBody>
-      </p:sp>
-      <p:sp>
-        <p:nvSpPr>
-          <p:cNvPr id="8" name="한 줄 문구"/>
+              <a:t>와 주셔서 고맙습니다</a:t>
+            </a:r>
+          </a:p>
+        </p:txBody>
+      </p:sp>
+      <p:sp>
+        <p:nvSpPr>
+          <p:cNvPr id="4" name="한 줄 문구"/>
           <p:cNvSpPr txBox="1"/>
           <p:nvPr/>
         </p:nvSpPr>
         <p:spPr>
           <a:xfrm>
-            <a:off x="731501" y="4160520"/>
-            <a:ext cx="8534186" cy="822960"/>
+            <a:off x="853418" y="3749039"/>
+            <a:ext cx="6095847" cy="822960"/>
           </a:xfrm>
           <a:prstGeom prst="rect">
             <a:avLst/>
@@ -6452,21 +5846,21 @@
                   <a:srgbClr val="11394A"/>
                 </a:solidFill>
               </a:rPr>
-              <a:t>오늘의 축복을 오래도록 간직하겠습니다</a:t>
-            </a:r>
-          </a:p>
-        </p:txBody>
-      </p:sp>
-      <p:sp>
-        <p:nvSpPr>
-          <p:cNvPr id="9" name="안내 문구"/>
+              <a:t>잘 살겠습니다</a:t>
+            </a:r>
+          </a:p>
+        </p:txBody>
+      </p:sp>
+      <p:sp>
+        <p:nvSpPr>
+          <p:cNvPr id="5" name="안내 문구"/>
           <p:cNvSpPr txBox="1"/>
           <p:nvPr/>
         </p:nvSpPr>
         <p:spPr>
           <a:xfrm>
-            <a:off x="731501" y="5029200"/>
-            <a:ext cx="8534186" cy="914400"/>
+            <a:off x="853418" y="4617720"/>
+            <a:ext cx="6095847" cy="914400"/>
           </a:xfrm>
           <a:prstGeom prst="rect">
             <a:avLst/>

--- a/public/fun/pack/pptx/wedding/결혼식_18_식순중심_바닷가등대.pptx
+++ b/public/fun/pack/pptx/wedding/결혼식_18_식순중심_바닷가등대.pptx
@@ -3347,7 +3347,7 @@
             <a:r>
               <a:rPr sz="3600" b="1" i="0">
                 <a:solidFill>
-                  <a:srgbClr val="11394A"/>
+                  <a:srgbClr val="11485F"/>
                 </a:solidFill>
               </a:rPr>
               <a:t>저희 결혼합니다</a:t>
@@ -3385,7 +3385,7 @@
             <a:r>
               <a:rPr sz="1700" b="0" i="1">
                 <a:solidFill>
-                  <a:srgbClr val="11394A"/>
+                  <a:srgbClr val="11485F"/>
                 </a:solidFill>
               </a:rPr>
               <a:t>주례 없이 직접 인사드립니다</a:t>
@@ -3487,7 +3487,7 @@
             <a:avLst/>
           </a:prstGeom>
           <a:solidFill>
-            <a:srgbClr val="25799D"/>
+            <a:srgbClr val="2695C5"/>
           </a:solidFill>
           <a:ln>
             <a:noFill/>
@@ -3554,11 +3554,11 @@
             <a:avLst/>
           </a:prstGeom>
           <a:solidFill>
-            <a:srgbClr val="CCE9F5"/>
+            <a:srgbClr val="D1EEFA"/>
           </a:solidFill>
           <a:ln w="19050">
             <a:solidFill>
-              <a:srgbClr val="25799D"/>
+              <a:srgbClr val="2695C5"/>
             </a:solidFill>
             <a:prstDash val="dash"/>
           </a:ln>
@@ -3577,7 +3577,7 @@
             <a:r>
               <a:rPr sz="1200" b="0" i="0">
                 <a:solidFill>
-                  <a:srgbClr val="11394A"/>
+                  <a:srgbClr val="11485F"/>
                 </a:solidFill>
               </a:rPr>
               <a:t>사진</a:t>
@@ -3615,7 +3615,7 @@
             <a:r>
               <a:rPr sz="1600" b="1" i="0">
                 <a:solidFill>
-                  <a:srgbClr val="11394A"/>
+                  <a:srgbClr val="11485F"/>
                 </a:solidFill>
               </a:rPr>
               <a:t>신랑</a:t>
@@ -3706,11 +3706,11 @@
             <a:avLst/>
           </a:prstGeom>
           <a:solidFill>
-            <a:srgbClr val="CCE9F5"/>
+            <a:srgbClr val="D1EEFA"/>
           </a:solidFill>
           <a:ln w="19050">
             <a:solidFill>
-              <a:srgbClr val="25799D"/>
+              <a:srgbClr val="2695C5"/>
             </a:solidFill>
             <a:prstDash val="dash"/>
           </a:ln>
@@ -3729,7 +3729,7 @@
             <a:r>
               <a:rPr sz="1200" b="0" i="0">
                 <a:solidFill>
-                  <a:srgbClr val="11394A"/>
+                  <a:srgbClr val="11485F"/>
                 </a:solidFill>
               </a:rPr>
               <a:t>사진</a:t>
@@ -3767,7 +3767,7 @@
             <a:r>
               <a:rPr sz="1600" b="1" i="0">
                 <a:solidFill>
-                  <a:srgbClr val="11394A"/>
+                  <a:srgbClr val="11485F"/>
                 </a:solidFill>
               </a:rPr>
               <a:t>신부</a:t>
@@ -3884,7 +3884,7 @@
             <a:avLst/>
           </a:prstGeom>
           <a:solidFill>
-            <a:srgbClr val="25799D"/>
+            <a:srgbClr val="2695C5"/>
           </a:solidFill>
           <a:ln>
             <a:noFill/>
@@ -3979,30 +3979,30 @@
                   <a:tcPr anchor="ctr" marL="73152" marR="73152">
                     <a:lnL w="9525" cap="flat" cmpd="sng" algn="ctr">
                       <a:solidFill>
-                        <a:srgbClr val="25799D"/>
+                        <a:srgbClr val="2695C5"/>
                       </a:solidFill>
                       <a:prstDash val="solid"/>
                     </a:lnL>
                     <a:lnR w="9525" cap="flat" cmpd="sng" algn="ctr">
                       <a:solidFill>
-                        <a:srgbClr val="25799D"/>
+                        <a:srgbClr val="2695C5"/>
                       </a:solidFill>
                       <a:prstDash val="solid"/>
                     </a:lnR>
                     <a:lnT w="9525" cap="flat" cmpd="sng" algn="ctr">
                       <a:solidFill>
-                        <a:srgbClr val="25799D"/>
+                        <a:srgbClr val="2695C5"/>
                       </a:solidFill>
                       <a:prstDash val="solid"/>
                     </a:lnT>
                     <a:lnB w="9525" cap="flat" cmpd="sng" algn="ctr">
                       <a:solidFill>
-                        <a:srgbClr val="25799D"/>
+                        <a:srgbClr val="2695C5"/>
                       </a:solidFill>
                       <a:prstDash val="solid"/>
                     </a:lnB>
                     <a:solidFill>
-                      <a:srgbClr val="25799D"/>
+                      <a:srgbClr val="2695C5"/>
                     </a:solidFill>
                   </a:tcPr>
                 </a:tc>
@@ -4025,30 +4025,30 @@
                   <a:tcPr anchor="ctr" marL="73152" marR="73152">
                     <a:lnL w="9525" cap="flat" cmpd="sng" algn="ctr">
                       <a:solidFill>
-                        <a:srgbClr val="25799D"/>
+                        <a:srgbClr val="2695C5"/>
                       </a:solidFill>
                       <a:prstDash val="solid"/>
                     </a:lnL>
                     <a:lnR w="9525" cap="flat" cmpd="sng" algn="ctr">
                       <a:solidFill>
-                        <a:srgbClr val="25799D"/>
+                        <a:srgbClr val="2695C5"/>
                       </a:solidFill>
                       <a:prstDash val="solid"/>
                     </a:lnR>
                     <a:lnT w="9525" cap="flat" cmpd="sng" algn="ctr">
                       <a:solidFill>
-                        <a:srgbClr val="25799D"/>
+                        <a:srgbClr val="2695C5"/>
                       </a:solidFill>
                       <a:prstDash val="solid"/>
                     </a:lnT>
                     <a:lnB w="9525" cap="flat" cmpd="sng" algn="ctr">
                       <a:solidFill>
-                        <a:srgbClr val="25799D"/>
+                        <a:srgbClr val="2695C5"/>
                       </a:solidFill>
                       <a:prstDash val="solid"/>
                     </a:lnB>
                     <a:solidFill>
-                      <a:srgbClr val="25799D"/>
+                      <a:srgbClr val="2695C5"/>
                     </a:solidFill>
                   </a:tcPr>
                 </a:tc>
@@ -4071,30 +4071,30 @@
                   <a:tcPr anchor="ctr" marL="73152" marR="73152">
                     <a:lnL w="9525" cap="flat" cmpd="sng" algn="ctr">
                       <a:solidFill>
-                        <a:srgbClr val="25799D"/>
+                        <a:srgbClr val="2695C5"/>
                       </a:solidFill>
                       <a:prstDash val="solid"/>
                     </a:lnL>
                     <a:lnR w="9525" cap="flat" cmpd="sng" algn="ctr">
                       <a:solidFill>
-                        <a:srgbClr val="25799D"/>
+                        <a:srgbClr val="2695C5"/>
                       </a:solidFill>
                       <a:prstDash val="solid"/>
                     </a:lnR>
                     <a:lnT w="9525" cap="flat" cmpd="sng" algn="ctr">
                       <a:solidFill>
-                        <a:srgbClr val="25799D"/>
+                        <a:srgbClr val="2695C5"/>
                       </a:solidFill>
                       <a:prstDash val="solid"/>
                     </a:lnT>
                     <a:lnB w="9525" cap="flat" cmpd="sng" algn="ctr">
                       <a:solidFill>
-                        <a:srgbClr val="25799D"/>
+                        <a:srgbClr val="2695C5"/>
                       </a:solidFill>
                       <a:prstDash val="solid"/>
                     </a:lnB>
                     <a:solidFill>
-                      <a:srgbClr val="25799D"/>
+                      <a:srgbClr val="2695C5"/>
                     </a:solidFill>
                   </a:tcPr>
                 </a:tc>
@@ -4109,7 +4109,7 @@
                       <a:r>
                         <a:rPr sz="1500" b="1">
                           <a:solidFill>
-                            <a:srgbClr val="11394A"/>
+                            <a:srgbClr val="11485F"/>
                           </a:solidFill>
                         </a:rPr>
                         <a:t>00:00</a:t>
@@ -4119,30 +4119,30 @@
                   <a:tcPr anchor="ctr" marL="73152" marR="73152">
                     <a:lnL w="9525" cap="flat" cmpd="sng" algn="ctr">
                       <a:solidFill>
-                        <a:srgbClr val="CCE9F5"/>
+                        <a:srgbClr val="D1EEFA"/>
                       </a:solidFill>
                       <a:prstDash val="solid"/>
                     </a:lnL>
                     <a:lnR w="9525" cap="flat" cmpd="sng" algn="ctr">
                       <a:solidFill>
-                        <a:srgbClr val="CCE9F5"/>
+                        <a:srgbClr val="D1EEFA"/>
                       </a:solidFill>
                       <a:prstDash val="solid"/>
                     </a:lnR>
                     <a:lnT w="9525" cap="flat" cmpd="sng" algn="ctr">
                       <a:solidFill>
-                        <a:srgbClr val="CCE9F5"/>
+                        <a:srgbClr val="D1EEFA"/>
                       </a:solidFill>
                       <a:prstDash val="solid"/>
                     </a:lnT>
                     <a:lnB w="9525" cap="flat" cmpd="sng" algn="ctr">
                       <a:solidFill>
-                        <a:srgbClr val="CCE9F5"/>
+                        <a:srgbClr val="D1EEFA"/>
                       </a:solidFill>
                       <a:prstDash val="solid"/>
                     </a:lnB>
                     <a:solidFill>
-                      <a:srgbClr val="CCE9F5"/>
+                      <a:srgbClr val="D1EEFA"/>
                     </a:solidFill>
                   </a:tcPr>
                 </a:tc>
@@ -4165,25 +4165,25 @@
                   <a:tcPr anchor="ctr" marL="73152" marR="73152">
                     <a:lnL w="9525" cap="flat" cmpd="sng" algn="ctr">
                       <a:solidFill>
-                        <a:srgbClr val="CCE9F5"/>
+                        <a:srgbClr val="D1EEFA"/>
                       </a:solidFill>
                       <a:prstDash val="solid"/>
                     </a:lnL>
                     <a:lnR w="9525" cap="flat" cmpd="sng" algn="ctr">
                       <a:solidFill>
-                        <a:srgbClr val="CCE9F5"/>
+                        <a:srgbClr val="D1EEFA"/>
                       </a:solidFill>
                       <a:prstDash val="solid"/>
                     </a:lnR>
                     <a:lnT w="9525" cap="flat" cmpd="sng" algn="ctr">
                       <a:solidFill>
-                        <a:srgbClr val="CCE9F5"/>
+                        <a:srgbClr val="D1EEFA"/>
                       </a:solidFill>
                       <a:prstDash val="solid"/>
                     </a:lnT>
                     <a:lnB w="9525" cap="flat" cmpd="sng" algn="ctr">
                       <a:solidFill>
-                        <a:srgbClr val="CCE9F5"/>
+                        <a:srgbClr val="D1EEFA"/>
                       </a:solidFill>
                       <a:prstDash val="solid"/>
                     </a:lnB>
@@ -4211,25 +4211,25 @@
                   <a:tcPr anchor="ctr" marL="73152" marR="73152">
                     <a:lnL w="9525" cap="flat" cmpd="sng" algn="ctr">
                       <a:solidFill>
-                        <a:srgbClr val="CCE9F5"/>
+                        <a:srgbClr val="D1EEFA"/>
                       </a:solidFill>
                       <a:prstDash val="solid"/>
                     </a:lnL>
                     <a:lnR w="9525" cap="flat" cmpd="sng" algn="ctr">
                       <a:solidFill>
-                        <a:srgbClr val="CCE9F5"/>
+                        <a:srgbClr val="D1EEFA"/>
                       </a:solidFill>
                       <a:prstDash val="solid"/>
                     </a:lnR>
                     <a:lnT w="9525" cap="flat" cmpd="sng" algn="ctr">
                       <a:solidFill>
-                        <a:srgbClr val="CCE9F5"/>
+                        <a:srgbClr val="D1EEFA"/>
                       </a:solidFill>
                       <a:prstDash val="solid"/>
                     </a:lnT>
                     <a:lnB w="9525" cap="flat" cmpd="sng" algn="ctr">
                       <a:solidFill>
-                        <a:srgbClr val="CCE9F5"/>
+                        <a:srgbClr val="D1EEFA"/>
                       </a:solidFill>
                       <a:prstDash val="solid"/>
                     </a:lnB>
@@ -4249,7 +4249,7 @@
                       <a:r>
                         <a:rPr sz="1500" b="1">
                           <a:solidFill>
-                            <a:srgbClr val="11394A"/>
+                            <a:srgbClr val="11485F"/>
                           </a:solidFill>
                         </a:rPr>
                         <a:t>00:00</a:t>
@@ -4259,30 +4259,30 @@
                   <a:tcPr anchor="ctr" marL="73152" marR="73152">
                     <a:lnL w="9525" cap="flat" cmpd="sng" algn="ctr">
                       <a:solidFill>
-                        <a:srgbClr val="CCE9F5"/>
+                        <a:srgbClr val="D1EEFA"/>
                       </a:solidFill>
                       <a:prstDash val="solid"/>
                     </a:lnL>
                     <a:lnR w="9525" cap="flat" cmpd="sng" algn="ctr">
                       <a:solidFill>
-                        <a:srgbClr val="CCE9F5"/>
+                        <a:srgbClr val="D1EEFA"/>
                       </a:solidFill>
                       <a:prstDash val="solid"/>
                     </a:lnR>
                     <a:lnT w="9525" cap="flat" cmpd="sng" algn="ctr">
                       <a:solidFill>
-                        <a:srgbClr val="CCE9F5"/>
+                        <a:srgbClr val="D1EEFA"/>
                       </a:solidFill>
                       <a:prstDash val="solid"/>
                     </a:lnT>
                     <a:lnB w="9525" cap="flat" cmpd="sng" algn="ctr">
                       <a:solidFill>
-                        <a:srgbClr val="CCE9F5"/>
+                        <a:srgbClr val="D1EEFA"/>
                       </a:solidFill>
                       <a:prstDash val="solid"/>
                     </a:lnB>
                     <a:solidFill>
-                      <a:srgbClr val="CCE9F5"/>
+                      <a:srgbClr val="D1EEFA"/>
                     </a:solidFill>
                   </a:tcPr>
                 </a:tc>
@@ -4305,30 +4305,30 @@
                   <a:tcPr anchor="ctr" marL="73152" marR="73152">
                     <a:lnL w="9525" cap="flat" cmpd="sng" algn="ctr">
                       <a:solidFill>
-                        <a:srgbClr val="CCE9F5"/>
+                        <a:srgbClr val="D1EEFA"/>
                       </a:solidFill>
                       <a:prstDash val="solid"/>
                     </a:lnL>
                     <a:lnR w="9525" cap="flat" cmpd="sng" algn="ctr">
                       <a:solidFill>
-                        <a:srgbClr val="CCE9F5"/>
+                        <a:srgbClr val="D1EEFA"/>
                       </a:solidFill>
                       <a:prstDash val="solid"/>
                     </a:lnR>
                     <a:lnT w="9525" cap="flat" cmpd="sng" algn="ctr">
                       <a:solidFill>
-                        <a:srgbClr val="CCE9F5"/>
+                        <a:srgbClr val="D1EEFA"/>
                       </a:solidFill>
                       <a:prstDash val="solid"/>
                     </a:lnT>
                     <a:lnB w="9525" cap="flat" cmpd="sng" algn="ctr">
                       <a:solidFill>
-                        <a:srgbClr val="CCE9F5"/>
+                        <a:srgbClr val="D1EEFA"/>
                       </a:solidFill>
                       <a:prstDash val="solid"/>
                     </a:lnB>
                     <a:solidFill>
-                      <a:srgbClr val="EEF7FB"/>
+                      <a:srgbClr val="EEF8FC"/>
                     </a:solidFill>
                   </a:tcPr>
                 </a:tc>
@@ -4351,30 +4351,30 @@
                   <a:tcPr anchor="ctr" marL="73152" marR="73152">
                     <a:lnL w="9525" cap="flat" cmpd="sng" algn="ctr">
                       <a:solidFill>
-                        <a:srgbClr val="CCE9F5"/>
+                        <a:srgbClr val="D1EEFA"/>
                       </a:solidFill>
                       <a:prstDash val="solid"/>
                     </a:lnL>
                     <a:lnR w="9525" cap="flat" cmpd="sng" algn="ctr">
                       <a:solidFill>
-                        <a:srgbClr val="CCE9F5"/>
+                        <a:srgbClr val="D1EEFA"/>
                       </a:solidFill>
                       <a:prstDash val="solid"/>
                     </a:lnR>
                     <a:lnT w="9525" cap="flat" cmpd="sng" algn="ctr">
                       <a:solidFill>
-                        <a:srgbClr val="CCE9F5"/>
+                        <a:srgbClr val="D1EEFA"/>
                       </a:solidFill>
                       <a:prstDash val="solid"/>
                     </a:lnT>
                     <a:lnB w="9525" cap="flat" cmpd="sng" algn="ctr">
                       <a:solidFill>
-                        <a:srgbClr val="CCE9F5"/>
+                        <a:srgbClr val="D1EEFA"/>
                       </a:solidFill>
                       <a:prstDash val="solid"/>
                     </a:lnB>
                     <a:solidFill>
-                      <a:srgbClr val="EEF7FB"/>
+                      <a:srgbClr val="EEF8FC"/>
                     </a:solidFill>
                   </a:tcPr>
                 </a:tc>
@@ -4389,7 +4389,7 @@
                       <a:r>
                         <a:rPr sz="1500" b="1">
                           <a:solidFill>
-                            <a:srgbClr val="11394A"/>
+                            <a:srgbClr val="11485F"/>
                           </a:solidFill>
                         </a:rPr>
                         <a:t>00:00</a:t>
@@ -4399,30 +4399,30 @@
                   <a:tcPr anchor="ctr" marL="73152" marR="73152">
                     <a:lnL w="9525" cap="flat" cmpd="sng" algn="ctr">
                       <a:solidFill>
-                        <a:srgbClr val="CCE9F5"/>
+                        <a:srgbClr val="D1EEFA"/>
                       </a:solidFill>
                       <a:prstDash val="solid"/>
                     </a:lnL>
                     <a:lnR w="9525" cap="flat" cmpd="sng" algn="ctr">
                       <a:solidFill>
-                        <a:srgbClr val="CCE9F5"/>
+                        <a:srgbClr val="D1EEFA"/>
                       </a:solidFill>
                       <a:prstDash val="solid"/>
                     </a:lnR>
                     <a:lnT w="9525" cap="flat" cmpd="sng" algn="ctr">
                       <a:solidFill>
-                        <a:srgbClr val="CCE9F5"/>
+                        <a:srgbClr val="D1EEFA"/>
                       </a:solidFill>
                       <a:prstDash val="solid"/>
                     </a:lnT>
                     <a:lnB w="9525" cap="flat" cmpd="sng" algn="ctr">
                       <a:solidFill>
-                        <a:srgbClr val="CCE9F5"/>
+                        <a:srgbClr val="D1EEFA"/>
                       </a:solidFill>
                       <a:prstDash val="solid"/>
                     </a:lnB>
                     <a:solidFill>
-                      <a:srgbClr val="CCE9F5"/>
+                      <a:srgbClr val="D1EEFA"/>
                     </a:solidFill>
                   </a:tcPr>
                 </a:tc>
@@ -4445,25 +4445,25 @@
                   <a:tcPr anchor="ctr" marL="73152" marR="73152">
                     <a:lnL w="9525" cap="flat" cmpd="sng" algn="ctr">
                       <a:solidFill>
-                        <a:srgbClr val="CCE9F5"/>
+                        <a:srgbClr val="D1EEFA"/>
                       </a:solidFill>
                       <a:prstDash val="solid"/>
                     </a:lnL>
                     <a:lnR w="9525" cap="flat" cmpd="sng" algn="ctr">
                       <a:solidFill>
-                        <a:srgbClr val="CCE9F5"/>
+                        <a:srgbClr val="D1EEFA"/>
                       </a:solidFill>
                       <a:prstDash val="solid"/>
                     </a:lnR>
                     <a:lnT w="9525" cap="flat" cmpd="sng" algn="ctr">
                       <a:solidFill>
-                        <a:srgbClr val="CCE9F5"/>
+                        <a:srgbClr val="D1EEFA"/>
                       </a:solidFill>
                       <a:prstDash val="solid"/>
                     </a:lnT>
                     <a:lnB w="9525" cap="flat" cmpd="sng" algn="ctr">
                       <a:solidFill>
-                        <a:srgbClr val="CCE9F5"/>
+                        <a:srgbClr val="D1EEFA"/>
                       </a:solidFill>
                       <a:prstDash val="solid"/>
                     </a:lnB>
@@ -4491,25 +4491,25 @@
                   <a:tcPr anchor="ctr" marL="73152" marR="73152">
                     <a:lnL w="9525" cap="flat" cmpd="sng" algn="ctr">
                       <a:solidFill>
-                        <a:srgbClr val="CCE9F5"/>
+                        <a:srgbClr val="D1EEFA"/>
                       </a:solidFill>
                       <a:prstDash val="solid"/>
                     </a:lnL>
                     <a:lnR w="9525" cap="flat" cmpd="sng" algn="ctr">
                       <a:solidFill>
-                        <a:srgbClr val="CCE9F5"/>
+                        <a:srgbClr val="D1EEFA"/>
                       </a:solidFill>
                       <a:prstDash val="solid"/>
                     </a:lnR>
                     <a:lnT w="9525" cap="flat" cmpd="sng" algn="ctr">
                       <a:solidFill>
-                        <a:srgbClr val="CCE9F5"/>
+                        <a:srgbClr val="D1EEFA"/>
                       </a:solidFill>
                       <a:prstDash val="solid"/>
                     </a:lnT>
                     <a:lnB w="9525" cap="flat" cmpd="sng" algn="ctr">
                       <a:solidFill>
-                        <a:srgbClr val="CCE9F5"/>
+                        <a:srgbClr val="D1EEFA"/>
                       </a:solidFill>
                       <a:prstDash val="solid"/>
                     </a:lnB>
@@ -4529,7 +4529,7 @@
                       <a:r>
                         <a:rPr sz="1500" b="1">
                           <a:solidFill>
-                            <a:srgbClr val="11394A"/>
+                            <a:srgbClr val="11485F"/>
                           </a:solidFill>
                         </a:rPr>
                         <a:t>00:00</a:t>
@@ -4539,30 +4539,30 @@
                   <a:tcPr anchor="ctr" marL="73152" marR="73152">
                     <a:lnL w="9525" cap="flat" cmpd="sng" algn="ctr">
                       <a:solidFill>
-                        <a:srgbClr val="CCE9F5"/>
+                        <a:srgbClr val="D1EEFA"/>
                       </a:solidFill>
                       <a:prstDash val="solid"/>
                     </a:lnL>
                     <a:lnR w="9525" cap="flat" cmpd="sng" algn="ctr">
                       <a:solidFill>
-                        <a:srgbClr val="CCE9F5"/>
+                        <a:srgbClr val="D1EEFA"/>
                       </a:solidFill>
                       <a:prstDash val="solid"/>
                     </a:lnR>
                     <a:lnT w="9525" cap="flat" cmpd="sng" algn="ctr">
                       <a:solidFill>
-                        <a:srgbClr val="CCE9F5"/>
+                        <a:srgbClr val="D1EEFA"/>
                       </a:solidFill>
                       <a:prstDash val="solid"/>
                     </a:lnT>
                     <a:lnB w="9525" cap="flat" cmpd="sng" algn="ctr">
                       <a:solidFill>
-                        <a:srgbClr val="CCE9F5"/>
+                        <a:srgbClr val="D1EEFA"/>
                       </a:solidFill>
                       <a:prstDash val="solid"/>
                     </a:lnB>
                     <a:solidFill>
-                      <a:srgbClr val="CCE9F5"/>
+                      <a:srgbClr val="D1EEFA"/>
                     </a:solidFill>
                   </a:tcPr>
                 </a:tc>
@@ -4585,30 +4585,30 @@
                   <a:tcPr anchor="ctr" marL="73152" marR="73152">
                     <a:lnL w="9525" cap="flat" cmpd="sng" algn="ctr">
                       <a:solidFill>
-                        <a:srgbClr val="CCE9F5"/>
+                        <a:srgbClr val="D1EEFA"/>
                       </a:solidFill>
                       <a:prstDash val="solid"/>
                     </a:lnL>
                     <a:lnR w="9525" cap="flat" cmpd="sng" algn="ctr">
                       <a:solidFill>
-                        <a:srgbClr val="CCE9F5"/>
+                        <a:srgbClr val="D1EEFA"/>
                       </a:solidFill>
                       <a:prstDash val="solid"/>
                     </a:lnR>
                     <a:lnT w="9525" cap="flat" cmpd="sng" algn="ctr">
                       <a:solidFill>
-                        <a:srgbClr val="CCE9F5"/>
+                        <a:srgbClr val="D1EEFA"/>
                       </a:solidFill>
                       <a:prstDash val="solid"/>
                     </a:lnT>
                     <a:lnB w="9525" cap="flat" cmpd="sng" algn="ctr">
                       <a:solidFill>
-                        <a:srgbClr val="CCE9F5"/>
+                        <a:srgbClr val="D1EEFA"/>
                       </a:solidFill>
                       <a:prstDash val="solid"/>
                     </a:lnB>
                     <a:solidFill>
-                      <a:srgbClr val="EEF7FB"/>
+                      <a:srgbClr val="EEF8FC"/>
                     </a:solidFill>
                   </a:tcPr>
                 </a:tc>
@@ -4631,30 +4631,30 @@
                   <a:tcPr anchor="ctr" marL="73152" marR="73152">
                     <a:lnL w="9525" cap="flat" cmpd="sng" algn="ctr">
                       <a:solidFill>
-                        <a:srgbClr val="CCE9F5"/>
+                        <a:srgbClr val="D1EEFA"/>
                       </a:solidFill>
                       <a:prstDash val="solid"/>
                     </a:lnL>
                     <a:lnR w="9525" cap="flat" cmpd="sng" algn="ctr">
                       <a:solidFill>
-                        <a:srgbClr val="CCE9F5"/>
+                        <a:srgbClr val="D1EEFA"/>
                       </a:solidFill>
                       <a:prstDash val="solid"/>
                     </a:lnR>
                     <a:lnT w="9525" cap="flat" cmpd="sng" algn="ctr">
                       <a:solidFill>
-                        <a:srgbClr val="CCE9F5"/>
+                        <a:srgbClr val="D1EEFA"/>
                       </a:solidFill>
                       <a:prstDash val="solid"/>
                     </a:lnT>
                     <a:lnB w="9525" cap="flat" cmpd="sng" algn="ctr">
                       <a:solidFill>
-                        <a:srgbClr val="CCE9F5"/>
+                        <a:srgbClr val="D1EEFA"/>
                       </a:solidFill>
                       <a:prstDash val="solid"/>
                     </a:lnB>
                     <a:solidFill>
-                      <a:srgbClr val="EEF7FB"/>
+                      <a:srgbClr val="EEF8FC"/>
                     </a:solidFill>
                   </a:tcPr>
                 </a:tc>
@@ -4669,7 +4669,7 @@
                       <a:r>
                         <a:rPr sz="1500" b="1">
                           <a:solidFill>
-                            <a:srgbClr val="11394A"/>
+                            <a:srgbClr val="11485F"/>
                           </a:solidFill>
                         </a:rPr>
                         <a:t>00:00</a:t>
@@ -4679,30 +4679,30 @@
                   <a:tcPr anchor="ctr" marL="73152" marR="73152">
                     <a:lnL w="9525" cap="flat" cmpd="sng" algn="ctr">
                       <a:solidFill>
-                        <a:srgbClr val="CCE9F5"/>
+                        <a:srgbClr val="D1EEFA"/>
                       </a:solidFill>
                       <a:prstDash val="solid"/>
                     </a:lnL>
                     <a:lnR w="9525" cap="flat" cmpd="sng" algn="ctr">
                       <a:solidFill>
-                        <a:srgbClr val="CCE9F5"/>
+                        <a:srgbClr val="D1EEFA"/>
                       </a:solidFill>
                       <a:prstDash val="solid"/>
                     </a:lnR>
                     <a:lnT w="9525" cap="flat" cmpd="sng" algn="ctr">
                       <a:solidFill>
-                        <a:srgbClr val="CCE9F5"/>
+                        <a:srgbClr val="D1EEFA"/>
                       </a:solidFill>
                       <a:prstDash val="solid"/>
                     </a:lnT>
                     <a:lnB w="9525" cap="flat" cmpd="sng" algn="ctr">
                       <a:solidFill>
-                        <a:srgbClr val="CCE9F5"/>
+                        <a:srgbClr val="D1EEFA"/>
                       </a:solidFill>
                       <a:prstDash val="solid"/>
                     </a:lnB>
                     <a:solidFill>
-                      <a:srgbClr val="CCE9F5"/>
+                      <a:srgbClr val="D1EEFA"/>
                     </a:solidFill>
                   </a:tcPr>
                 </a:tc>
@@ -4725,25 +4725,25 @@
                   <a:tcPr anchor="ctr" marL="73152" marR="73152">
                     <a:lnL w="9525" cap="flat" cmpd="sng" algn="ctr">
                       <a:solidFill>
-                        <a:srgbClr val="CCE9F5"/>
+                        <a:srgbClr val="D1EEFA"/>
                       </a:solidFill>
                       <a:prstDash val="solid"/>
                     </a:lnL>
                     <a:lnR w="9525" cap="flat" cmpd="sng" algn="ctr">
                       <a:solidFill>
-                        <a:srgbClr val="CCE9F5"/>
+                        <a:srgbClr val="D1EEFA"/>
                       </a:solidFill>
                       <a:prstDash val="solid"/>
                     </a:lnR>
                     <a:lnT w="9525" cap="flat" cmpd="sng" algn="ctr">
                       <a:solidFill>
-                        <a:srgbClr val="CCE9F5"/>
+                        <a:srgbClr val="D1EEFA"/>
                       </a:solidFill>
                       <a:prstDash val="solid"/>
                     </a:lnT>
                     <a:lnB w="9525" cap="flat" cmpd="sng" algn="ctr">
                       <a:solidFill>
-                        <a:srgbClr val="CCE9F5"/>
+                        <a:srgbClr val="D1EEFA"/>
                       </a:solidFill>
                       <a:prstDash val="solid"/>
                     </a:lnB>
@@ -4771,25 +4771,25 @@
                   <a:tcPr anchor="ctr" marL="73152" marR="73152">
                     <a:lnL w="9525" cap="flat" cmpd="sng" algn="ctr">
                       <a:solidFill>
-                        <a:srgbClr val="CCE9F5"/>
+                        <a:srgbClr val="D1EEFA"/>
                       </a:solidFill>
                       <a:prstDash val="solid"/>
                     </a:lnL>
                     <a:lnR w="9525" cap="flat" cmpd="sng" algn="ctr">
                       <a:solidFill>
-                        <a:srgbClr val="CCE9F5"/>
+                        <a:srgbClr val="D1EEFA"/>
                       </a:solidFill>
                       <a:prstDash val="solid"/>
                     </a:lnR>
                     <a:lnT w="9525" cap="flat" cmpd="sng" algn="ctr">
                       <a:solidFill>
-                        <a:srgbClr val="CCE9F5"/>
+                        <a:srgbClr val="D1EEFA"/>
                       </a:solidFill>
                       <a:prstDash val="solid"/>
                     </a:lnT>
                     <a:lnB w="9525" cap="flat" cmpd="sng" algn="ctr">
                       <a:solidFill>
-                        <a:srgbClr val="CCE9F5"/>
+                        <a:srgbClr val="D1EEFA"/>
                       </a:solidFill>
                       <a:prstDash val="solid"/>
                     </a:lnB>
@@ -4844,7 +4844,7 @@
             <a:avLst/>
           </a:prstGeom>
           <a:solidFill>
-            <a:srgbClr val="25799D"/>
+            <a:srgbClr val="2695C5"/>
           </a:solidFill>
           <a:ln>
             <a:noFill/>
@@ -4913,11 +4913,11 @@
             </a:avLst>
           </a:prstGeom>
           <a:solidFill>
-            <a:srgbClr val="EEF7FB"/>
+            <a:srgbClr val="EEF8FC"/>
           </a:solidFill>
           <a:ln w="15875">
             <a:solidFill>
-              <a:srgbClr val="CCE9F5"/>
+              <a:srgbClr val="D1EEFA"/>
             </a:solidFill>
           </a:ln>
         </p:spPr>
@@ -4944,7 +4944,7 @@
             <a:avLst/>
           </a:prstGeom>
           <a:solidFill>
-            <a:srgbClr val="25799D"/>
+            <a:srgbClr val="2695C5"/>
           </a:solidFill>
           <a:ln>
             <a:noFill/>
@@ -5002,7 +5002,7 @@
             <a:r>
               <a:rPr sz="1800" b="1" i="0">
                 <a:solidFill>
-                  <a:srgbClr val="11394A"/>
+                  <a:srgbClr val="11485F"/>
                 </a:solidFill>
               </a:rPr>
               <a:t>주차 안내</a:t>
@@ -5065,11 +5065,11 @@
             </a:avLst>
           </a:prstGeom>
           <a:solidFill>
-            <a:srgbClr val="EEF7FB"/>
+            <a:srgbClr val="EEF8FC"/>
           </a:solidFill>
           <a:ln w="15875">
             <a:solidFill>
-              <a:srgbClr val="CCE9F5"/>
+              <a:srgbClr val="D1EEFA"/>
             </a:solidFill>
           </a:ln>
         </p:spPr>
@@ -5096,7 +5096,7 @@
             <a:avLst/>
           </a:prstGeom>
           <a:solidFill>
-            <a:srgbClr val="25799D"/>
+            <a:srgbClr val="2695C5"/>
           </a:solidFill>
           <a:ln>
             <a:noFill/>
@@ -5154,7 +5154,7 @@
             <a:r>
               <a:rPr sz="1800" b="1" i="0">
                 <a:solidFill>
-                  <a:srgbClr val="11394A"/>
+                  <a:srgbClr val="11485F"/>
                 </a:solidFill>
               </a:rPr>
               <a:t>식사 안내</a:t>
@@ -5217,11 +5217,11 @@
             </a:avLst>
           </a:prstGeom>
           <a:solidFill>
-            <a:srgbClr val="EEF7FB"/>
+            <a:srgbClr val="EEF8FC"/>
           </a:solidFill>
           <a:ln w="15875">
             <a:solidFill>
-              <a:srgbClr val="CCE9F5"/>
+              <a:srgbClr val="D1EEFA"/>
             </a:solidFill>
           </a:ln>
         </p:spPr>
@@ -5248,7 +5248,7 @@
             <a:avLst/>
           </a:prstGeom>
           <a:solidFill>
-            <a:srgbClr val="25799D"/>
+            <a:srgbClr val="2695C5"/>
           </a:solidFill>
           <a:ln>
             <a:noFill/>
@@ -5306,7 +5306,7 @@
             <a:r>
               <a:rPr sz="1800" b="1" i="0">
                 <a:solidFill>
-                  <a:srgbClr val="11394A"/>
+                  <a:srgbClr val="11485F"/>
                 </a:solidFill>
               </a:rPr>
               <a:t>기념 촬영</a:t>
@@ -5393,7 +5393,7 @@
             <a:avLst/>
           </a:prstGeom>
           <a:solidFill>
-            <a:srgbClr val="25799D"/>
+            <a:srgbClr val="2695C5"/>
           </a:solidFill>
           <a:ln>
             <a:noFill/>
@@ -5462,11 +5462,11 @@
             </a:avLst>
           </a:prstGeom>
           <a:solidFill>
-            <a:srgbClr val="CCE9F5"/>
+            <a:srgbClr val="D1EEFA"/>
           </a:solidFill>
           <a:ln w="19050">
             <a:solidFill>
-              <a:srgbClr val="25799D"/>
+              <a:srgbClr val="2695C5"/>
             </a:solidFill>
             <a:prstDash val="dash"/>
           </a:ln>
@@ -5485,7 +5485,7 @@
             <a:r>
               <a:rPr sz="1200" b="0" i="0">
                 <a:solidFill>
-                  <a:srgbClr val="11394A"/>
+                  <a:srgbClr val="11485F"/>
                 </a:solidFill>
               </a:rPr>
               <a:t>사진 1</a:t>
@@ -5510,11 +5510,11 @@
             </a:avLst>
           </a:prstGeom>
           <a:solidFill>
-            <a:srgbClr val="CCE9F5"/>
+            <a:srgbClr val="D1EEFA"/>
           </a:solidFill>
           <a:ln w="19050">
             <a:solidFill>
-              <a:srgbClr val="25799D"/>
+              <a:srgbClr val="2695C5"/>
             </a:solidFill>
             <a:prstDash val="dash"/>
           </a:ln>
@@ -5533,7 +5533,7 @@
             <a:r>
               <a:rPr sz="1200" b="0" i="0">
                 <a:solidFill>
-                  <a:srgbClr val="11394A"/>
+                  <a:srgbClr val="11485F"/>
                 </a:solidFill>
               </a:rPr>
               <a:t>사진 2</a:t>
@@ -5558,11 +5558,11 @@
             </a:avLst>
           </a:prstGeom>
           <a:solidFill>
-            <a:srgbClr val="CCE9F5"/>
+            <a:srgbClr val="D1EEFA"/>
           </a:solidFill>
           <a:ln w="19050">
             <a:solidFill>
-              <a:srgbClr val="25799D"/>
+              <a:srgbClr val="2695C5"/>
             </a:solidFill>
             <a:prstDash val="dash"/>
           </a:ln>
@@ -5581,7 +5581,7 @@
             <a:r>
               <a:rPr sz="1200" b="0" i="0">
                 <a:solidFill>
-                  <a:srgbClr val="11394A"/>
+                  <a:srgbClr val="11485F"/>
                 </a:solidFill>
               </a:rPr>
               <a:t>사진 3</a:t>
@@ -5606,11 +5606,11 @@
             </a:avLst>
           </a:prstGeom>
           <a:solidFill>
-            <a:srgbClr val="CCE9F5"/>
+            <a:srgbClr val="D1EEFA"/>
           </a:solidFill>
           <a:ln w="19050">
             <a:solidFill>
-              <a:srgbClr val="25799D"/>
+              <a:srgbClr val="2695C5"/>
             </a:solidFill>
             <a:prstDash val="dash"/>
           </a:ln>
@@ -5629,7 +5629,7 @@
             <a:r>
               <a:rPr sz="1200" b="0" i="0">
                 <a:solidFill>
-                  <a:srgbClr val="11394A"/>
+                  <a:srgbClr val="11485F"/>
                 </a:solidFill>
               </a:rPr>
               <a:t>사진 4</a:t>
@@ -5654,11 +5654,11 @@
             </a:avLst>
           </a:prstGeom>
           <a:solidFill>
-            <a:srgbClr val="CCE9F5"/>
+            <a:srgbClr val="D1EEFA"/>
           </a:solidFill>
           <a:ln w="19050">
             <a:solidFill>
-              <a:srgbClr val="25799D"/>
+              <a:srgbClr val="2695C5"/>
             </a:solidFill>
             <a:prstDash val="dash"/>
           </a:ln>
@@ -5677,7 +5677,7 @@
             <a:r>
               <a:rPr sz="1200" b="0" i="0">
                 <a:solidFill>
-                  <a:srgbClr val="11394A"/>
+                  <a:srgbClr val="11485F"/>
                 </a:solidFill>
               </a:rPr>
               <a:t>사진 5</a:t>
@@ -5702,11 +5702,11 @@
             </a:avLst>
           </a:prstGeom>
           <a:solidFill>
-            <a:srgbClr val="CCE9F5"/>
+            <a:srgbClr val="D1EEFA"/>
           </a:solidFill>
           <a:ln w="19050">
             <a:solidFill>
-              <a:srgbClr val="25799D"/>
+              <a:srgbClr val="2695C5"/>
             </a:solidFill>
             <a:prstDash val="dash"/>
           </a:ln>
@@ -5725,7 +5725,7 @@
             <a:r>
               <a:rPr sz="1200" b="0" i="0">
                 <a:solidFill>
-                  <a:srgbClr val="11394A"/>
+                  <a:srgbClr val="11485F"/>
                 </a:solidFill>
               </a:rPr>
               <a:t>사진 6</a:t>
@@ -5805,7 +5805,7 @@
             <a:r>
               <a:rPr sz="3400" b="1" i="0">
                 <a:solidFill>
-                  <a:srgbClr val="11394A"/>
+                  <a:srgbClr val="11485F"/>
                 </a:solidFill>
               </a:rPr>
               <a:t>와 주셔서 고맙습니다</a:t>
@@ -5843,7 +5843,7 @@
             <a:r>
               <a:rPr sz="1700" b="0" i="1">
                 <a:solidFill>
-                  <a:srgbClr val="11394A"/>
+                  <a:srgbClr val="11485F"/>
                 </a:solidFill>
               </a:rPr>
               <a:t>잘 살겠습니다</a:t>
@@ -5908,34 +5908,34 @@
         <a:sysClr val="window" lastClr="FFFFFF"/>
       </a:lt1>
       <a:dk2>
-        <a:srgbClr val="11394A"/>
+        <a:srgbClr val="11485F"/>
       </a:dk2>
       <a:lt2>
-        <a:srgbClr val="EEF7FB"/>
+        <a:srgbClr val="EEF8FC"/>
       </a:lt2>
       <a:accent1>
-        <a:srgbClr val="25799D"/>
+        <a:srgbClr val="2695C5"/>
       </a:accent1>
       <a:accent2>
-        <a:srgbClr val="913B4C"/>
+        <a:srgbClr val="209DB6"/>
       </a:accent2>
       <a:accent3>
-        <a:srgbClr val="11394A"/>
+        <a:srgbClr val="11485F"/>
       </a:accent3>
       <a:accent4>
-        <a:srgbClr val="CCE9F5"/>
+        <a:srgbClr val="D1EEFA"/>
       </a:accent4>
       <a:accent5>
-        <a:srgbClr val="5B5A74"/>
+        <a:srgbClr val="2399BE"/>
       </a:accent5>
       <a:accent6>
-        <a:srgbClr val="708892"/>
+        <a:srgbClr val="70919F"/>
       </a:accent6>
       <a:hlink>
-        <a:srgbClr val="25799D"/>
+        <a:srgbClr val="2695C5"/>
       </a:hlink>
       <a:folHlink>
-        <a:srgbClr val="11394A"/>
+        <a:srgbClr val="11485F"/>
       </a:folHlink>
     </a:clrScheme>
     <a:fontScheme name="Office">

--- a/public/fun/pack/pptx/wedding/결혼식_18_식순중심_바닷가등대.pptx
+++ b/public/fun/pack/pptx/wedding/결혼식_18_식순중심_바닷가등대.pptx
@@ -3286,6 +3286,14 @@
 <file path=ppt/slides/slide1.xml><?xml version="1.0" encoding="utf-8"?>
 <p:sld xmlns:a="http://schemas.openxmlformats.org/drawingml/2006/main" xmlns:p="http://schemas.openxmlformats.org/presentationml/2006/main" xmlns:r="http://schemas.openxmlformats.org/officeDocument/2006/relationships">
   <p:cSld>
+    <p:bg>
+      <p:bgPr>
+        <a:solidFill>
+          <a:srgbClr val="EAF7FD"/>
+        </a:solidFill>
+        <a:effectLst/>
+      </p:bgPr>
+    </p:bg>
     <p:spTree>
       <p:nvGrpSpPr>
         <p:cNvPr id="1" name=""/>
@@ -3293,30 +3301,119 @@
         <p:nvPr/>
       </p:nvGrpSpPr>
       <p:grpSpPr/>
-      <p:pic>
-        <p:nvPicPr>
-          <p:cNvPr id="3" name="표지 그림" descr="wedding-18.jpg"/>
-          <p:cNvPicPr>
-            <a:picLocks noChangeAspect="1"/>
-          </p:cNvPicPr>
+      <p:sp>
+        <p:nvSpPr>
+          <p:cNvPr id="3" name="사진 자리"/>
+          <p:cNvSpPr/>
           <p:nvPr/>
-        </p:nvPicPr>
-        <p:blipFill>
-          <a:blip r:embed="rId2"/>
-          <a:stretch>
-            <a:fillRect/>
-          </a:stretch>
-        </p:blipFill>
-        <p:spPr>
-          <a:xfrm>
-            <a:off x="0" y="0"/>
-            <a:ext cx="12191695" cy="6858000"/>
+        </p:nvSpPr>
+        <p:spPr>
+          <a:xfrm>
+            <a:off x="1463003" y="685800"/>
+            <a:ext cx="3169840" cy="5486400"/>
+          </a:xfrm>
+          <a:prstGeom prst="round2SameRect">
+            <a:avLst>
+              <a:gd name="adj1" fmla="val 50000"/>
+              <a:gd name="adj2" fmla="val 0"/>
+            </a:avLst>
+          </a:prstGeom>
+          <a:solidFill>
+            <a:srgbClr val="A5DCF3"/>
+          </a:solidFill>
+          <a:ln>
+            <a:noFill/>
+          </a:ln>
+        </p:spPr>
+        <p:txBody>
+          <a:bodyPr rtlCol="0" anchor="ctr" wrap="square" lIns="54864" rIns="54864" tIns="27432" bIns="27432">
+            <a:noAutofit/>
+          </a:bodyPr>
+          <a:lstStyle/>
+          <a:p>
+            <a:pPr algn="ctr">
+              <a:lnSpc>
+                <a:spcPct val="100000"/>
+              </a:lnSpc>
+            </a:pPr>
+            <a:r>
+              <a:rPr sz="1400" b="0" i="0">
+                <a:solidFill>
+                  <a:srgbClr val="273F49"/>
+                </a:solidFill>
+              </a:rPr>
+              <a:t>사진을 넣어 주세요</a:t>
+            </a:r>
+          </a:p>
+        </p:txBody>
+      </p:sp>
+      <p:sp>
+        <p:nvSpPr>
+          <p:cNvPr id="4" name="장식"/>
+          <p:cNvSpPr/>
+          <p:nvPr/>
+        </p:nvSpPr>
+        <p:spPr>
+          <a:xfrm>
+            <a:off x="4358505" y="4251960"/>
+            <a:ext cx="1005840" cy="1005840"/>
+          </a:xfrm>
+          <a:prstGeom prst="ellipse">
+            <a:avLst/>
+          </a:prstGeom>
+          <a:solidFill>
+            <a:srgbClr val="A5DCF3"/>
+          </a:solidFill>
+          <a:ln>
+            <a:noFill/>
+          </a:ln>
+        </p:spPr>
+        <p:txBody>
+          <a:bodyPr rtlCol="0" anchor="ctr"/>
+          <a:lstStyle/>
+          <a:p>
+            <a:pPr algn="ctr"/>
+          </a:p>
+        </p:txBody>
+      </p:sp>
+      <p:sp>
+        <p:nvSpPr>
+          <p:cNvPr id="5" name="라벨"/>
+          <p:cNvSpPr txBox="1"/>
+          <p:nvPr/>
+        </p:nvSpPr>
+        <p:spPr>
+          <a:xfrm>
+            <a:off x="6827349" y="2148840"/>
+            <a:ext cx="4632844" cy="274320"/>
           </a:xfrm>
           <a:prstGeom prst="rect">
             <a:avLst/>
           </a:prstGeom>
-        </p:spPr>
-      </p:pic>
+          <a:noFill/>
+        </p:spPr>
+        <p:txBody>
+          <a:bodyPr wrap="square" lIns="54864" rIns="54864" tIns="27432" bIns="27432" anchor="t">
+            <a:noAutofit/>
+          </a:bodyPr>
+          <a:lstStyle/>
+          <a:p>
+            <a:pPr algn="l">
+              <a:lnSpc>
+                <a:spcPct val="115000"/>
+              </a:lnSpc>
+            </a:pPr>
+            <a:r>
+              <a:rPr sz="1000" b="1" i="0" spc="250">
+                <a:solidFill>
+                  <a:srgbClr val="26231F"/>
+                </a:solidFill>
+              </a:rPr>
+              <a:t>WEDDING</a:t>
+            </a:r>
+          </a:p>
+        </p:txBody>
+      </p:sp>
       <p:sp>
         <p:nvSpPr>
           <p:cNvPr id="2" name="Title 1"/>
@@ -3329,8 +3426,8 @@
         </p:nvSpPr>
         <p:spPr>
           <a:xfrm>
-            <a:off x="853418" y="2057400"/>
-            <a:ext cx="6095847" cy="1554480"/>
+            <a:off x="6827349" y="2606040"/>
+            <a:ext cx="4632844" cy="1188720"/>
           </a:xfrm>
         </p:spPr>
         <p:txBody>
@@ -3347,7 +3444,7 @@
             <a:r>
               <a:rPr sz="3600" b="1" i="0">
                 <a:solidFill>
-                  <a:srgbClr val="11485F"/>
+                  <a:srgbClr val="26231F"/>
                 </a:solidFill>
               </a:rPr>
               <a:t>저희 결혼합니다</a:t>
@@ -3357,14 +3454,14 @@
       </p:sp>
       <p:sp>
         <p:nvSpPr>
-          <p:cNvPr id="4" name="한 줄 문구"/>
+          <p:cNvPr id="6" name="한 줄 문구"/>
           <p:cNvSpPr txBox="1"/>
           <p:nvPr/>
         </p:nvSpPr>
         <p:spPr>
           <a:xfrm>
-            <a:off x="853418" y="3749039"/>
-            <a:ext cx="6095847" cy="822960"/>
+            <a:off x="6827349" y="3886200"/>
+            <a:ext cx="4632844" cy="822960"/>
           </a:xfrm>
           <a:prstGeom prst="rect">
             <a:avLst/>
@@ -3383,9 +3480,9 @@
               </a:lnSpc>
             </a:pPr>
             <a:r>
-              <a:rPr sz="1700" b="0" i="1">
+              <a:rPr sz="1700" b="0" i="0">
                 <a:solidFill>
-                  <a:srgbClr val="11485F"/>
+                  <a:srgbClr val="26231F"/>
                 </a:solidFill>
               </a:rPr>
               <a:t>주례 없이 직접 인사드립니다</a:t>
@@ -3395,14 +3492,14 @@
       </p:sp>
       <p:sp>
         <p:nvSpPr>
-          <p:cNvPr id="5" name="안내 문구"/>
+          <p:cNvPr id="7" name="안내 문구"/>
           <p:cNvSpPr txBox="1"/>
           <p:nvPr/>
         </p:nvSpPr>
         <p:spPr>
           <a:xfrm>
-            <a:off x="853418" y="4617720"/>
-            <a:ext cx="6095847" cy="914400"/>
+            <a:off x="6827349" y="4754880"/>
+            <a:ext cx="4632844" cy="914400"/>
           </a:xfrm>
           <a:prstGeom prst="rect">
             <a:avLst/>
@@ -3423,7 +3520,7 @@
             <a:r>
               <a:rPr sz="1400" b="0" i="0">
                 <a:solidFill>
-                  <a:srgbClr val="666666"/>
+                  <a:srgbClr val="26231F"/>
                 </a:solidFill>
               </a:rPr>
               <a:t>신랑 이름 ♥ 신부 이름</a:t>
@@ -3438,10 +3535,10 @@
             <a:r>
               <a:rPr sz="1400" b="0" i="0">
                 <a:solidFill>
-                  <a:srgbClr val="666666"/>
+                  <a:srgbClr val="26231F"/>
                 </a:solidFill>
               </a:rPr>
-              <a:t>2027. 00. 00 · 예식장 이름</a:t>
+              <a:t>날짜 입력 · 예식장 이름</a:t>
             </a:r>
           </a:p>
         </p:txBody>
@@ -3480,14 +3577,14 @@
         </p:nvSpPr>
         <p:spPr>
           <a:xfrm>
-            <a:off x="0" y="384048"/>
-            <a:ext cx="9509522" cy="896112"/>
-          </a:xfrm>
-          <a:prstGeom prst="homePlate">
+            <a:off x="640080" y="6400800"/>
+            <a:ext cx="10911535" cy="10972"/>
+          </a:xfrm>
+          <a:prstGeom prst="rect">
             <a:avLst/>
           </a:prstGeom>
           <a:solidFill>
-            <a:srgbClr val="2695C5"/>
+            <a:srgbClr val="26231F"/>
           </a:solidFill>
           <a:ln>
             <a:noFill/>
@@ -3503,6 +3600,73 @@
       </p:sp>
       <p:sp>
         <p:nvSpPr>
+          <p:cNvPr id="4" name="하단 라벨"/>
+          <p:cNvSpPr txBox="1"/>
+          <p:nvPr/>
+        </p:nvSpPr>
+        <p:spPr>
+          <a:xfrm>
+            <a:off x="640080" y="6437376"/>
+            <a:ext cx="5486400" cy="274320"/>
+          </a:xfrm>
+          <a:prstGeom prst="rect">
+            <a:avLst/>
+          </a:prstGeom>
+          <a:noFill/>
+        </p:spPr>
+        <p:txBody>
+          <a:bodyPr wrap="square" lIns="54864" rIns="54864" tIns="27432" bIns="27432" anchor="ctr">
+            <a:noAutofit/>
+          </a:bodyPr>
+          <a:lstStyle/>
+          <a:p>
+            <a:pPr algn="l">
+              <a:lnSpc>
+                <a:spcPct val="115000"/>
+              </a:lnSpc>
+            </a:pPr>
+            <a:r>
+              <a:rPr sz="900" b="1" i="0" spc="250">
+                <a:solidFill>
+                  <a:srgbClr val="26231F"/>
+                </a:solidFill>
+              </a:rPr>
+              <a:t>WEDDING</a:t>
+            </a:r>
+          </a:p>
+        </p:txBody>
+      </p:sp>
+      <p:sp>
+        <p:nvSpPr>
+          <p:cNvPr id="5" name="포인트"/>
+          <p:cNvSpPr/>
+          <p:nvPr/>
+        </p:nvSpPr>
+        <p:spPr>
+          <a:xfrm>
+            <a:off x="11213287" y="6473952"/>
+            <a:ext cx="219456" cy="87782"/>
+          </a:xfrm>
+          <a:prstGeom prst="wave">
+            <a:avLst/>
+          </a:prstGeom>
+          <a:solidFill>
+            <a:srgbClr val="7BC9EA"/>
+          </a:solidFill>
+          <a:ln>
+            <a:noFill/>
+          </a:ln>
+        </p:spPr>
+        <p:txBody>
+          <a:bodyPr rtlCol="0" anchor="ctr"/>
+          <a:lstStyle/>
+          <a:p>
+            <a:pPr algn="ctr"/>
+          </a:p>
+        </p:txBody>
+      </p:sp>
+      <p:sp>
+        <p:nvSpPr>
           <p:cNvPr id="2" name="Title 1"/>
           <p:cNvSpPr>
             <a:spLocks noGrp="1"/>
@@ -3513,8 +3677,8 @@
         </p:nvSpPr>
         <p:spPr>
           <a:xfrm>
-            <a:off x="640080" y="411480"/>
-            <a:ext cx="8412242" cy="822960"/>
+            <a:off x="640080" y="502920"/>
+            <a:ext cx="10911535" cy="914400"/>
           </a:xfrm>
         </p:spPr>
         <p:txBody>
@@ -3531,7 +3695,7 @@
             <a:r>
               <a:rPr sz="3000" b="1" i="0">
                 <a:solidFill>
-                  <a:srgbClr val="FFFFFF"/>
+                  <a:srgbClr val="26231F"/>
                 </a:solidFill>
               </a:rPr>
               <a:t>신랑 · 신부 소개</a:t>
@@ -3541,14 +3705,14 @@
       </p:sp>
       <p:sp>
         <p:nvSpPr>
-          <p:cNvPr id="4" name="사진 자리"/>
+          <p:cNvPr id="6" name="사진 자리"/>
           <p:cNvSpPr/>
           <p:nvPr/>
         </p:nvSpPr>
         <p:spPr>
           <a:xfrm>
-            <a:off x="1950643" y="1645920"/>
-            <a:ext cx="2377440" cy="2377440"/>
+            <a:off x="1996363" y="1600200"/>
+            <a:ext cx="2286000" cy="2286000"/>
           </a:xfrm>
           <a:prstGeom prst="ellipse">
             <a:avLst/>
@@ -3557,9 +3721,7 @@
             <a:srgbClr val="D1EEFA"/>
           </a:solidFill>
           <a:ln w="19050">
-            <a:solidFill>
-              <a:srgbClr val="2695C5"/>
-            </a:solidFill>
+            <a:noFill/>
             <a:prstDash val="dash"/>
           </a:ln>
         </p:spPr>
@@ -3577,7 +3739,7 @@
             <a:r>
               <a:rPr sz="1200" b="0" i="0">
                 <a:solidFill>
-                  <a:srgbClr val="11485F"/>
+                  <a:srgbClr val="8E8780"/>
                 </a:solidFill>
               </a:rPr>
               <a:t>사진</a:t>
@@ -3587,13 +3749,13 @@
       </p:sp>
       <p:sp>
         <p:nvSpPr>
-          <p:cNvPr id="5" name="TextBox 4"/>
+          <p:cNvPr id="7" name="TextBox 6"/>
           <p:cNvSpPr txBox="1"/>
           <p:nvPr/>
         </p:nvSpPr>
         <p:spPr>
           <a:xfrm>
-            <a:off x="640080" y="4114800"/>
+            <a:off x="640080" y="3977639"/>
             <a:ext cx="4998567" cy="411480"/>
           </a:xfrm>
           <a:prstGeom prst="rect">
@@ -3615,7 +3777,7 @@
             <a:r>
               <a:rPr sz="1600" b="1" i="0">
                 <a:solidFill>
-                  <a:srgbClr val="11485F"/>
+                  <a:srgbClr val="273F49"/>
                 </a:solidFill>
               </a:rPr>
               <a:t>신랑</a:t>
@@ -3625,14 +3787,14 @@
       </p:sp>
       <p:sp>
         <p:nvSpPr>
-          <p:cNvPr id="6" name="TextBox 5"/>
+          <p:cNvPr id="8" name="TextBox 7"/>
           <p:cNvSpPr txBox="1"/>
           <p:nvPr/>
         </p:nvSpPr>
         <p:spPr>
           <a:xfrm>
-            <a:off x="731519" y="4572000"/>
-            <a:ext cx="4815687" cy="1828800"/>
+            <a:off x="731519" y="4434840"/>
+            <a:ext cx="4815687" cy="1737360"/>
           </a:xfrm>
           <a:prstGeom prst="rect">
             <a:avLst/>
@@ -3693,14 +3855,14 @@
       </p:sp>
       <p:sp>
         <p:nvSpPr>
-          <p:cNvPr id="7" name="사진 자리"/>
+          <p:cNvPr id="9" name="사진 자리"/>
           <p:cNvSpPr/>
           <p:nvPr/>
         </p:nvSpPr>
         <p:spPr>
           <a:xfrm>
-            <a:off x="7863611" y="1645920"/>
-            <a:ext cx="2377440" cy="2377440"/>
+            <a:off x="7909331" y="1600200"/>
+            <a:ext cx="2286000" cy="2286000"/>
           </a:xfrm>
           <a:prstGeom prst="ellipse">
             <a:avLst/>
@@ -3709,9 +3871,7 @@
             <a:srgbClr val="D1EEFA"/>
           </a:solidFill>
           <a:ln w="19050">
-            <a:solidFill>
-              <a:srgbClr val="2695C5"/>
-            </a:solidFill>
+            <a:noFill/>
             <a:prstDash val="dash"/>
           </a:ln>
         </p:spPr>
@@ -3729,7 +3889,7 @@
             <a:r>
               <a:rPr sz="1200" b="0" i="0">
                 <a:solidFill>
-                  <a:srgbClr val="11485F"/>
+                  <a:srgbClr val="8E8780"/>
                 </a:solidFill>
               </a:rPr>
               <a:t>사진</a:t>
@@ -3739,13 +3899,13 @@
       </p:sp>
       <p:sp>
         <p:nvSpPr>
-          <p:cNvPr id="8" name="TextBox 7"/>
+          <p:cNvPr id="10" name="TextBox 9"/>
           <p:cNvSpPr txBox="1"/>
           <p:nvPr/>
         </p:nvSpPr>
         <p:spPr>
           <a:xfrm>
-            <a:off x="6553047" y="4114800"/>
+            <a:off x="6553047" y="3977639"/>
             <a:ext cx="4998567" cy="411480"/>
           </a:xfrm>
           <a:prstGeom prst="rect">
@@ -3767,7 +3927,7 @@
             <a:r>
               <a:rPr sz="1600" b="1" i="0">
                 <a:solidFill>
-                  <a:srgbClr val="11485F"/>
+                  <a:srgbClr val="273F49"/>
                 </a:solidFill>
               </a:rPr>
               <a:t>신부</a:t>
@@ -3777,14 +3937,14 @@
       </p:sp>
       <p:sp>
         <p:nvSpPr>
-          <p:cNvPr id="9" name="TextBox 8"/>
+          <p:cNvPr id="11" name="TextBox 10"/>
           <p:cNvSpPr txBox="1"/>
           <p:nvPr/>
         </p:nvSpPr>
         <p:spPr>
           <a:xfrm>
-            <a:off x="6644487" y="4572000"/>
-            <a:ext cx="4815687" cy="1828800"/>
+            <a:off x="6644487" y="4434840"/>
+            <a:ext cx="4815687" cy="1737360"/>
           </a:xfrm>
           <a:prstGeom prst="rect">
             <a:avLst/>
@@ -3877,14 +4037,14 @@
         </p:nvSpPr>
         <p:spPr>
           <a:xfrm>
-            <a:off x="0" y="384048"/>
-            <a:ext cx="9509522" cy="896112"/>
-          </a:xfrm>
-          <a:prstGeom prst="homePlate">
+            <a:off x="640080" y="6400800"/>
+            <a:ext cx="10911535" cy="10972"/>
+          </a:xfrm>
+          <a:prstGeom prst="rect">
             <a:avLst/>
           </a:prstGeom>
           <a:solidFill>
-            <a:srgbClr val="2695C5"/>
+            <a:srgbClr val="26231F"/>
           </a:solidFill>
           <a:ln>
             <a:noFill/>
@@ -3900,6 +4060,73 @@
       </p:sp>
       <p:sp>
         <p:nvSpPr>
+          <p:cNvPr id="4" name="하단 라벨"/>
+          <p:cNvSpPr txBox="1"/>
+          <p:nvPr/>
+        </p:nvSpPr>
+        <p:spPr>
+          <a:xfrm>
+            <a:off x="640080" y="6437376"/>
+            <a:ext cx="5486400" cy="274320"/>
+          </a:xfrm>
+          <a:prstGeom prst="rect">
+            <a:avLst/>
+          </a:prstGeom>
+          <a:noFill/>
+        </p:spPr>
+        <p:txBody>
+          <a:bodyPr wrap="square" lIns="54864" rIns="54864" tIns="27432" bIns="27432" anchor="ctr">
+            <a:noAutofit/>
+          </a:bodyPr>
+          <a:lstStyle/>
+          <a:p>
+            <a:pPr algn="l">
+              <a:lnSpc>
+                <a:spcPct val="115000"/>
+              </a:lnSpc>
+            </a:pPr>
+            <a:r>
+              <a:rPr sz="900" b="1" i="0" spc="250">
+                <a:solidFill>
+                  <a:srgbClr val="26231F"/>
+                </a:solidFill>
+              </a:rPr>
+              <a:t>WEDDING</a:t>
+            </a:r>
+          </a:p>
+        </p:txBody>
+      </p:sp>
+      <p:sp>
+        <p:nvSpPr>
+          <p:cNvPr id="5" name="포인트"/>
+          <p:cNvSpPr/>
+          <p:nvPr/>
+        </p:nvSpPr>
+        <p:spPr>
+          <a:xfrm>
+            <a:off x="11213287" y="6473952"/>
+            <a:ext cx="219456" cy="87782"/>
+          </a:xfrm>
+          <a:prstGeom prst="wave">
+            <a:avLst/>
+          </a:prstGeom>
+          <a:solidFill>
+            <a:srgbClr val="7BC9EA"/>
+          </a:solidFill>
+          <a:ln>
+            <a:noFill/>
+          </a:ln>
+        </p:spPr>
+        <p:txBody>
+          <a:bodyPr rtlCol="0" anchor="ctr"/>
+          <a:lstStyle/>
+          <a:p>
+            <a:pPr algn="ctr"/>
+          </a:p>
+        </p:txBody>
+      </p:sp>
+      <p:sp>
+        <p:nvSpPr>
           <p:cNvPr id="2" name="Title 1"/>
           <p:cNvSpPr>
             <a:spLocks noGrp="1"/>
@@ -3910,8 +4137,8 @@
         </p:nvSpPr>
         <p:spPr>
           <a:xfrm>
-            <a:off x="640080" y="411480"/>
-            <a:ext cx="8412242" cy="822960"/>
+            <a:off x="640080" y="502920"/>
+            <a:ext cx="10911535" cy="914400"/>
           </a:xfrm>
         </p:spPr>
         <p:txBody>
@@ -3928,7 +4155,7 @@
             <a:r>
               <a:rPr sz="3000" b="1" i="0">
                 <a:solidFill>
-                  <a:srgbClr val="FFFFFF"/>
+                  <a:srgbClr val="26231F"/>
                 </a:solidFill>
               </a:rPr>
               <a:t>식순 안내</a:t>
@@ -3938,14 +4165,14 @@
       </p:sp>
       <p:graphicFrame>
         <p:nvGraphicFramePr>
-          <p:cNvPr id="4" name="표"/>
+          <p:cNvPr id="6" name="표"/>
           <p:cNvGraphicFramePr>
             <a:graphicFrameLocks noGrp="1"/>
           </p:cNvGraphicFramePr>
           <p:nvPr/>
         </p:nvGraphicFramePr>
         <p:xfrm>
-          <a:off x="640080" y="1645920"/>
+          <a:off x="640080" y="1600200"/>
           <a:ext cx="10911535" cy="3950208"/>
         </p:xfrm>
         <a:graphic>
@@ -3969,7 +4196,7 @@
                       <a:r>
                         <a:rPr sz="1500" b="1">
                           <a:solidFill>
-                            <a:srgbClr val="FFFFFF"/>
+                            <a:srgbClr val="26231F"/>
                           </a:solidFill>
                         </a:rPr>
                         <a:t>시간</a:t>
@@ -3979,30 +4206,30 @@
                   <a:tcPr anchor="ctr" marL="73152" marR="73152">
                     <a:lnL w="9525" cap="flat" cmpd="sng" algn="ctr">
                       <a:solidFill>
-                        <a:srgbClr val="2695C5"/>
+                        <a:srgbClr val="7BC9EA"/>
                       </a:solidFill>
                       <a:prstDash val="solid"/>
                     </a:lnL>
                     <a:lnR w="9525" cap="flat" cmpd="sng" algn="ctr">
                       <a:solidFill>
-                        <a:srgbClr val="2695C5"/>
+                        <a:srgbClr val="7BC9EA"/>
                       </a:solidFill>
                       <a:prstDash val="solid"/>
                     </a:lnR>
                     <a:lnT w="9525" cap="flat" cmpd="sng" algn="ctr">
                       <a:solidFill>
-                        <a:srgbClr val="2695C5"/>
+                        <a:srgbClr val="7BC9EA"/>
                       </a:solidFill>
                       <a:prstDash val="solid"/>
                     </a:lnT>
                     <a:lnB w="9525" cap="flat" cmpd="sng" algn="ctr">
                       <a:solidFill>
-                        <a:srgbClr val="2695C5"/>
+                        <a:srgbClr val="7BC9EA"/>
                       </a:solidFill>
                       <a:prstDash val="solid"/>
                     </a:lnB>
                     <a:solidFill>
-                      <a:srgbClr val="2695C5"/>
+                      <a:srgbClr val="7BC9EA"/>
                     </a:solidFill>
                   </a:tcPr>
                 </a:tc>
@@ -4015,7 +4242,7 @@
                       <a:r>
                         <a:rPr sz="1500" b="1">
                           <a:solidFill>
-                            <a:srgbClr val="FFFFFF"/>
+                            <a:srgbClr val="26231F"/>
                           </a:solidFill>
                         </a:rPr>
                         <a:t>순서</a:t>
@@ -4025,30 +4252,30 @@
                   <a:tcPr anchor="ctr" marL="73152" marR="73152">
                     <a:lnL w="9525" cap="flat" cmpd="sng" algn="ctr">
                       <a:solidFill>
-                        <a:srgbClr val="2695C5"/>
+                        <a:srgbClr val="7BC9EA"/>
                       </a:solidFill>
                       <a:prstDash val="solid"/>
                     </a:lnL>
                     <a:lnR w="9525" cap="flat" cmpd="sng" algn="ctr">
                       <a:solidFill>
-                        <a:srgbClr val="2695C5"/>
+                        <a:srgbClr val="7BC9EA"/>
                       </a:solidFill>
                       <a:prstDash val="solid"/>
                     </a:lnR>
                     <a:lnT w="9525" cap="flat" cmpd="sng" algn="ctr">
                       <a:solidFill>
-                        <a:srgbClr val="2695C5"/>
+                        <a:srgbClr val="7BC9EA"/>
                       </a:solidFill>
                       <a:prstDash val="solid"/>
                     </a:lnT>
                     <a:lnB w="9525" cap="flat" cmpd="sng" algn="ctr">
                       <a:solidFill>
-                        <a:srgbClr val="2695C5"/>
+                        <a:srgbClr val="7BC9EA"/>
                       </a:solidFill>
                       <a:prstDash val="solid"/>
                     </a:lnB>
                     <a:solidFill>
-                      <a:srgbClr val="2695C5"/>
+                      <a:srgbClr val="7BC9EA"/>
                     </a:solidFill>
                   </a:tcPr>
                 </a:tc>
@@ -4061,7 +4288,7 @@
                       <a:r>
                         <a:rPr sz="1500" b="1">
                           <a:solidFill>
-                            <a:srgbClr val="FFFFFF"/>
+                            <a:srgbClr val="26231F"/>
                           </a:solidFill>
                         </a:rPr>
                         <a:t>담당</a:t>
@@ -4071,30 +4298,30 @@
                   <a:tcPr anchor="ctr" marL="73152" marR="73152">
                     <a:lnL w="9525" cap="flat" cmpd="sng" algn="ctr">
                       <a:solidFill>
-                        <a:srgbClr val="2695C5"/>
+                        <a:srgbClr val="7BC9EA"/>
                       </a:solidFill>
                       <a:prstDash val="solid"/>
                     </a:lnL>
                     <a:lnR w="9525" cap="flat" cmpd="sng" algn="ctr">
                       <a:solidFill>
-                        <a:srgbClr val="2695C5"/>
+                        <a:srgbClr val="7BC9EA"/>
                       </a:solidFill>
                       <a:prstDash val="solid"/>
                     </a:lnR>
                     <a:lnT w="9525" cap="flat" cmpd="sng" algn="ctr">
                       <a:solidFill>
-                        <a:srgbClr val="2695C5"/>
+                        <a:srgbClr val="7BC9EA"/>
                       </a:solidFill>
                       <a:prstDash val="solid"/>
                     </a:lnT>
                     <a:lnB w="9525" cap="flat" cmpd="sng" algn="ctr">
                       <a:solidFill>
-                        <a:srgbClr val="2695C5"/>
+                        <a:srgbClr val="7BC9EA"/>
                       </a:solidFill>
                       <a:prstDash val="solid"/>
                     </a:lnB>
                     <a:solidFill>
-                      <a:srgbClr val="2695C5"/>
+                      <a:srgbClr val="7BC9EA"/>
                     </a:solidFill>
                   </a:tcPr>
                 </a:tc>
@@ -4109,7 +4336,7 @@
                       <a:r>
                         <a:rPr sz="1500" b="1">
                           <a:solidFill>
-                            <a:srgbClr val="11485F"/>
+                            <a:srgbClr val="273F49"/>
                           </a:solidFill>
                         </a:rPr>
                         <a:t>00:00</a:t>
@@ -4155,7 +4382,7 @@
                       <a:r>
                         <a:rPr sz="1500" b="0">
                           <a:solidFill>
-                            <a:srgbClr val="2B2B2B"/>
+                            <a:srgbClr val="26231F"/>
                           </a:solidFill>
                         </a:rPr>
                         <a:t>하객 맞이</a:t>
@@ -4201,7 +4428,7 @@
                       <a:r>
                         <a:rPr sz="1500" b="0">
                           <a:solidFill>
-                            <a:srgbClr val="2B2B2B"/>
+                            <a:srgbClr val="26231F"/>
                           </a:solidFill>
                         </a:rPr>
                         <a:t/>
@@ -4249,7 +4476,7 @@
                       <a:r>
                         <a:rPr sz="1500" b="1">
                           <a:solidFill>
-                            <a:srgbClr val="11485F"/>
+                            <a:srgbClr val="273F49"/>
                           </a:solidFill>
                         </a:rPr>
                         <a:t>00:00</a:t>
@@ -4295,7 +4522,7 @@
                       <a:r>
                         <a:rPr sz="1500" b="0">
                           <a:solidFill>
-                            <a:srgbClr val="2B2B2B"/>
+                            <a:srgbClr val="26231F"/>
                           </a:solidFill>
                         </a:rPr>
                         <a:t>신랑 · 신부 입장</a:t>
@@ -4328,7 +4555,7 @@
                       <a:prstDash val="solid"/>
                     </a:lnB>
                     <a:solidFill>
-                      <a:srgbClr val="EEF8FC"/>
+                      <a:srgbClr val="EAF7FD"/>
                     </a:solidFill>
                   </a:tcPr>
                 </a:tc>
@@ -4341,7 +4568,7 @@
                       <a:r>
                         <a:rPr sz="1500" b="0">
                           <a:solidFill>
-                            <a:srgbClr val="2B2B2B"/>
+                            <a:srgbClr val="26231F"/>
                           </a:solidFill>
                         </a:rPr>
                         <a:t/>
@@ -4374,7 +4601,7 @@
                       <a:prstDash val="solid"/>
                     </a:lnB>
                     <a:solidFill>
-                      <a:srgbClr val="EEF8FC"/>
+                      <a:srgbClr val="EAF7FD"/>
                     </a:solidFill>
                   </a:tcPr>
                 </a:tc>
@@ -4389,7 +4616,7 @@
                       <a:r>
                         <a:rPr sz="1500" b="1">
                           <a:solidFill>
-                            <a:srgbClr val="11485F"/>
+                            <a:srgbClr val="273F49"/>
                           </a:solidFill>
                         </a:rPr>
                         <a:t>00:00</a:t>
@@ -4435,7 +4662,7 @@
                       <a:r>
                         <a:rPr sz="1500" b="0">
                           <a:solidFill>
-                            <a:srgbClr val="2B2B2B"/>
+                            <a:srgbClr val="26231F"/>
                           </a:solidFill>
                         </a:rPr>
                         <a:t>혼인 서약</a:t>
@@ -4481,7 +4708,7 @@
                       <a:r>
                         <a:rPr sz="1500" b="0">
                           <a:solidFill>
-                            <a:srgbClr val="2B2B2B"/>
+                            <a:srgbClr val="26231F"/>
                           </a:solidFill>
                         </a:rPr>
                         <a:t/>
@@ -4529,7 +4756,7 @@
                       <a:r>
                         <a:rPr sz="1500" b="1">
                           <a:solidFill>
-                            <a:srgbClr val="11485F"/>
+                            <a:srgbClr val="273F49"/>
                           </a:solidFill>
                         </a:rPr>
                         <a:t>00:00</a:t>
@@ -4575,7 +4802,7 @@
                       <a:r>
                         <a:rPr sz="1500" b="0">
                           <a:solidFill>
-                            <a:srgbClr val="2B2B2B"/>
+                            <a:srgbClr val="26231F"/>
                           </a:solidFill>
                         </a:rPr>
                         <a:t>축가 · 감사 인사</a:t>
@@ -4608,7 +4835,7 @@
                       <a:prstDash val="solid"/>
                     </a:lnB>
                     <a:solidFill>
-                      <a:srgbClr val="EEF8FC"/>
+                      <a:srgbClr val="EAF7FD"/>
                     </a:solidFill>
                   </a:tcPr>
                 </a:tc>
@@ -4621,7 +4848,7 @@
                       <a:r>
                         <a:rPr sz="1500" b="0">
                           <a:solidFill>
-                            <a:srgbClr val="2B2B2B"/>
+                            <a:srgbClr val="26231F"/>
                           </a:solidFill>
                         </a:rPr>
                         <a:t/>
@@ -4654,7 +4881,7 @@
                       <a:prstDash val="solid"/>
                     </a:lnB>
                     <a:solidFill>
-                      <a:srgbClr val="EEF8FC"/>
+                      <a:srgbClr val="EAF7FD"/>
                     </a:solidFill>
                   </a:tcPr>
                 </a:tc>
@@ -4669,7 +4896,7 @@
                       <a:r>
                         <a:rPr sz="1500" b="1">
                           <a:solidFill>
-                            <a:srgbClr val="11485F"/>
+                            <a:srgbClr val="273F49"/>
                           </a:solidFill>
                         </a:rPr>
                         <a:t>00:00</a:t>
@@ -4715,7 +4942,7 @@
                       <a:r>
                         <a:rPr sz="1500" b="0">
                           <a:solidFill>
-                            <a:srgbClr val="2B2B2B"/>
+                            <a:srgbClr val="26231F"/>
                           </a:solidFill>
                         </a:rPr>
                         <a:t>기념 촬영 · 식사</a:t>
@@ -4761,7 +4988,7 @@
                       <a:r>
                         <a:rPr sz="1500" b="0">
                           <a:solidFill>
-                            <a:srgbClr val="2B2B2B"/>
+                            <a:srgbClr val="26231F"/>
                           </a:solidFill>
                         </a:rPr>
                         <a:t/>
@@ -4837,14 +5064,14 @@
         </p:nvSpPr>
         <p:spPr>
           <a:xfrm>
-            <a:off x="0" y="384048"/>
-            <a:ext cx="9509522" cy="896112"/>
-          </a:xfrm>
-          <a:prstGeom prst="homePlate">
+            <a:off x="640080" y="6400800"/>
+            <a:ext cx="10911535" cy="10972"/>
+          </a:xfrm>
+          <a:prstGeom prst="rect">
             <a:avLst/>
           </a:prstGeom>
           <a:solidFill>
-            <a:srgbClr val="2695C5"/>
+            <a:srgbClr val="26231F"/>
           </a:solidFill>
           <a:ln>
             <a:noFill/>
@@ -4860,6 +5087,73 @@
       </p:sp>
       <p:sp>
         <p:nvSpPr>
+          <p:cNvPr id="4" name="하단 라벨"/>
+          <p:cNvSpPr txBox="1"/>
+          <p:nvPr/>
+        </p:nvSpPr>
+        <p:spPr>
+          <a:xfrm>
+            <a:off x="640080" y="6437376"/>
+            <a:ext cx="5486400" cy="274320"/>
+          </a:xfrm>
+          <a:prstGeom prst="rect">
+            <a:avLst/>
+          </a:prstGeom>
+          <a:noFill/>
+        </p:spPr>
+        <p:txBody>
+          <a:bodyPr wrap="square" lIns="54864" rIns="54864" tIns="27432" bIns="27432" anchor="ctr">
+            <a:noAutofit/>
+          </a:bodyPr>
+          <a:lstStyle/>
+          <a:p>
+            <a:pPr algn="l">
+              <a:lnSpc>
+                <a:spcPct val="115000"/>
+              </a:lnSpc>
+            </a:pPr>
+            <a:r>
+              <a:rPr sz="900" b="1" i="0" spc="250">
+                <a:solidFill>
+                  <a:srgbClr val="26231F"/>
+                </a:solidFill>
+              </a:rPr>
+              <a:t>WEDDING</a:t>
+            </a:r>
+          </a:p>
+        </p:txBody>
+      </p:sp>
+      <p:sp>
+        <p:nvSpPr>
+          <p:cNvPr id="5" name="포인트"/>
+          <p:cNvSpPr/>
+          <p:nvPr/>
+        </p:nvSpPr>
+        <p:spPr>
+          <a:xfrm>
+            <a:off x="11213287" y="6473952"/>
+            <a:ext cx="219456" cy="87782"/>
+          </a:xfrm>
+          <a:prstGeom prst="wave">
+            <a:avLst/>
+          </a:prstGeom>
+          <a:solidFill>
+            <a:srgbClr val="7BC9EA"/>
+          </a:solidFill>
+          <a:ln>
+            <a:noFill/>
+          </a:ln>
+        </p:spPr>
+        <p:txBody>
+          <a:bodyPr rtlCol="0" anchor="ctr"/>
+          <a:lstStyle/>
+          <a:p>
+            <a:pPr algn="ctr"/>
+          </a:p>
+        </p:txBody>
+      </p:sp>
+      <p:sp>
+        <p:nvSpPr>
           <p:cNvPr id="2" name="Title 1"/>
           <p:cNvSpPr>
             <a:spLocks noGrp="1"/>
@@ -4870,8 +5164,8 @@
         </p:nvSpPr>
         <p:spPr>
           <a:xfrm>
-            <a:off x="640080" y="411480"/>
-            <a:ext cx="8412242" cy="822960"/>
+            <a:off x="640080" y="502920"/>
+            <a:ext cx="10911535" cy="914400"/>
           </a:xfrm>
         </p:spPr>
         <p:txBody>
@@ -4888,7 +5182,7 @@
             <a:r>
               <a:rPr sz="3000" b="1" i="0">
                 <a:solidFill>
-                  <a:srgbClr val="FFFFFF"/>
+                  <a:srgbClr val="26231F"/>
                 </a:solidFill>
               </a:rPr>
               <a:t>하객 안내</a:t>
@@ -4898,24 +5192,24 @@
       </p:sp>
       <p:sp>
         <p:nvSpPr>
-          <p:cNvPr id="4" name="카드 1"/>
+          <p:cNvPr id="6" name="카드 1"/>
           <p:cNvSpPr/>
           <p:nvPr/>
         </p:nvSpPr>
         <p:spPr>
           <a:xfrm>
-            <a:off x="640080" y="1645920"/>
-            <a:ext cx="3484778" cy="4754880"/>
+            <a:off x="640080" y="1600200"/>
+            <a:ext cx="3484778" cy="4572000"/>
           </a:xfrm>
           <a:prstGeom prst="roundRect">
             <a:avLst>
-              <a:gd name="adj" fmla="val 8000"/>
+              <a:gd name="adj" fmla="val 3000"/>
             </a:avLst>
           </a:prstGeom>
           <a:solidFill>
-            <a:srgbClr val="EEF8FC"/>
+            <a:srgbClr val="FFFFFF"/>
           </a:solidFill>
-          <a:ln w="15875">
+          <a:ln w="9525">
             <a:solidFill>
               <a:srgbClr val="D1EEFA"/>
             </a:solidFill>
@@ -4931,20 +5225,51 @@
       </p:sp>
       <p:sp>
         <p:nvSpPr>
-          <p:cNvPr id="5" name="번호 1"/>
+          <p:cNvPr id="7" name="위쪽 띠"/>
           <p:cNvSpPr/>
           <p:nvPr/>
         </p:nvSpPr>
         <p:spPr>
           <a:xfrm>
-            <a:off x="822959" y="1828800"/>
-            <a:ext cx="457200" cy="457200"/>
-          </a:xfrm>
-          <a:prstGeom prst="ellipse">
+            <a:off x="649224" y="1609344"/>
+            <a:ext cx="3466490" cy="82296"/>
+          </a:xfrm>
+          <a:prstGeom prst="rect">
             <a:avLst/>
           </a:prstGeom>
           <a:solidFill>
-            <a:srgbClr val="2695C5"/>
+            <a:srgbClr val="7BC9EA"/>
+          </a:solidFill>
+          <a:ln>
+            <a:noFill/>
+          </a:ln>
+        </p:spPr>
+        <p:txBody>
+          <a:bodyPr rtlCol="0" anchor="ctr"/>
+          <a:lstStyle/>
+          <a:p>
+            <a:pPr algn="ctr"/>
+          </a:p>
+        </p:txBody>
+      </p:sp>
+      <p:sp>
+        <p:nvSpPr>
+          <p:cNvPr id="8" name="번호 1"/>
+          <p:cNvSpPr/>
+          <p:nvPr/>
+        </p:nvSpPr>
+        <p:spPr>
+          <a:xfrm>
+            <a:off x="822959" y="1783080"/>
+            <a:ext cx="457200" cy="457200"/>
+          </a:xfrm>
+          <a:prstGeom prst="roundRect">
+            <a:avLst>
+              <a:gd name="adj" fmla="val 25000"/>
+            </a:avLst>
+          </a:prstGeom>
+          <a:solidFill>
+            <a:srgbClr val="7BC9EA"/>
           </a:solidFill>
           <a:ln>
             <a:noFill/>
@@ -4964,7 +5289,7 @@
             <a:r>
               <a:rPr sz="1600" b="1" i="0">
                 <a:solidFill>
-                  <a:srgbClr val="FFFFFF"/>
+                  <a:srgbClr val="26231F"/>
                 </a:solidFill>
               </a:rPr>
               <a:t>1</a:t>
@@ -4974,13 +5299,13 @@
       </p:sp>
       <p:sp>
         <p:nvSpPr>
-          <p:cNvPr id="6" name="TextBox 5"/>
+          <p:cNvPr id="9" name="TextBox 8"/>
           <p:cNvSpPr txBox="1"/>
           <p:nvPr/>
         </p:nvSpPr>
         <p:spPr>
           <a:xfrm>
-            <a:off x="777240" y="2423160"/>
+            <a:off x="777240" y="2377440"/>
             <a:ext cx="3210458" cy="640080"/>
           </a:xfrm>
           <a:prstGeom prst="rect">
@@ -5002,7 +5327,7 @@
             <a:r>
               <a:rPr sz="1800" b="1" i="0">
                 <a:solidFill>
-                  <a:srgbClr val="11485F"/>
+                  <a:srgbClr val="273F49"/>
                 </a:solidFill>
               </a:rPr>
               <a:t>주차 안내</a:t>
@@ -5012,14 +5337,14 @@
       </p:sp>
       <p:sp>
         <p:nvSpPr>
-          <p:cNvPr id="7" name="TextBox 6"/>
+          <p:cNvPr id="10" name="TextBox 9"/>
           <p:cNvSpPr txBox="1"/>
           <p:nvPr/>
         </p:nvSpPr>
         <p:spPr>
           <a:xfrm>
-            <a:off x="777240" y="3108960"/>
-            <a:ext cx="3210458" cy="3154679"/>
+            <a:off x="777240" y="3063240"/>
+            <a:ext cx="3210458" cy="2971800"/>
           </a:xfrm>
           <a:prstGeom prst="rect">
             <a:avLst/>
@@ -5040,7 +5365,7 @@
             <a:r>
               <a:rPr sz="1500" b="0" i="0">
                 <a:solidFill>
-                  <a:srgbClr val="2B2B2B"/>
+                  <a:srgbClr val="26231F"/>
                 </a:solidFill>
               </a:rPr>
               <a:t>입력하세요</a:t>
@@ -5050,24 +5375,24 @@
       </p:sp>
       <p:sp>
         <p:nvSpPr>
-          <p:cNvPr id="8" name="카드 2"/>
+          <p:cNvPr id="11" name="카드 2"/>
           <p:cNvSpPr/>
           <p:nvPr/>
         </p:nvSpPr>
         <p:spPr>
           <a:xfrm>
-            <a:off x="4353458" y="1645920"/>
-            <a:ext cx="3484778" cy="4754880"/>
+            <a:off x="4353458" y="1600200"/>
+            <a:ext cx="3484778" cy="4572000"/>
           </a:xfrm>
           <a:prstGeom prst="roundRect">
             <a:avLst>
-              <a:gd name="adj" fmla="val 8000"/>
+              <a:gd name="adj" fmla="val 3000"/>
             </a:avLst>
           </a:prstGeom>
           <a:solidFill>
-            <a:srgbClr val="EEF8FC"/>
+            <a:srgbClr val="FFFFFF"/>
           </a:solidFill>
-          <a:ln w="15875">
+          <a:ln w="9525">
             <a:solidFill>
               <a:srgbClr val="D1EEFA"/>
             </a:solidFill>
@@ -5083,20 +5408,51 @@
       </p:sp>
       <p:sp>
         <p:nvSpPr>
-          <p:cNvPr id="9" name="번호 2"/>
+          <p:cNvPr id="12" name="위쪽 띠"/>
           <p:cNvSpPr/>
           <p:nvPr/>
         </p:nvSpPr>
         <p:spPr>
           <a:xfrm>
-            <a:off x="4536338" y="1828800"/>
-            <a:ext cx="457200" cy="457200"/>
-          </a:xfrm>
-          <a:prstGeom prst="ellipse">
+            <a:off x="4362602" y="1609344"/>
+            <a:ext cx="3466490" cy="82296"/>
+          </a:xfrm>
+          <a:prstGeom prst="rect">
             <a:avLst/>
           </a:prstGeom>
           <a:solidFill>
-            <a:srgbClr val="2695C5"/>
+            <a:srgbClr val="7BC9EA"/>
+          </a:solidFill>
+          <a:ln>
+            <a:noFill/>
+          </a:ln>
+        </p:spPr>
+        <p:txBody>
+          <a:bodyPr rtlCol="0" anchor="ctr"/>
+          <a:lstStyle/>
+          <a:p>
+            <a:pPr algn="ctr"/>
+          </a:p>
+        </p:txBody>
+      </p:sp>
+      <p:sp>
+        <p:nvSpPr>
+          <p:cNvPr id="13" name="번호 2"/>
+          <p:cNvSpPr/>
+          <p:nvPr/>
+        </p:nvSpPr>
+        <p:spPr>
+          <a:xfrm>
+            <a:off x="4536338" y="1783080"/>
+            <a:ext cx="457200" cy="457200"/>
+          </a:xfrm>
+          <a:prstGeom prst="roundRect">
+            <a:avLst>
+              <a:gd name="adj" fmla="val 25000"/>
+            </a:avLst>
+          </a:prstGeom>
+          <a:solidFill>
+            <a:srgbClr val="7BC9EA"/>
           </a:solidFill>
           <a:ln>
             <a:noFill/>
@@ -5116,7 +5472,7 @@
             <a:r>
               <a:rPr sz="1600" b="1" i="0">
                 <a:solidFill>
-                  <a:srgbClr val="FFFFFF"/>
+                  <a:srgbClr val="26231F"/>
                 </a:solidFill>
               </a:rPr>
               <a:t>2</a:t>
@@ -5126,13 +5482,13 @@
       </p:sp>
       <p:sp>
         <p:nvSpPr>
-          <p:cNvPr id="10" name="TextBox 9"/>
+          <p:cNvPr id="14" name="TextBox 13"/>
           <p:cNvSpPr txBox="1"/>
           <p:nvPr/>
         </p:nvSpPr>
         <p:spPr>
           <a:xfrm>
-            <a:off x="4490618" y="2423160"/>
+            <a:off x="4490618" y="2377440"/>
             <a:ext cx="3210458" cy="640080"/>
           </a:xfrm>
           <a:prstGeom prst="rect">
@@ -5154,7 +5510,7 @@
             <a:r>
               <a:rPr sz="1800" b="1" i="0">
                 <a:solidFill>
-                  <a:srgbClr val="11485F"/>
+                  <a:srgbClr val="273F49"/>
                 </a:solidFill>
               </a:rPr>
               <a:t>식사 안내</a:t>
@@ -5164,14 +5520,14 @@
       </p:sp>
       <p:sp>
         <p:nvSpPr>
-          <p:cNvPr id="11" name="TextBox 10"/>
+          <p:cNvPr id="15" name="TextBox 14"/>
           <p:cNvSpPr txBox="1"/>
           <p:nvPr/>
         </p:nvSpPr>
         <p:spPr>
           <a:xfrm>
-            <a:off x="4490618" y="3108960"/>
-            <a:ext cx="3210458" cy="3154679"/>
+            <a:off x="4490618" y="3063240"/>
+            <a:ext cx="3210458" cy="2971800"/>
           </a:xfrm>
           <a:prstGeom prst="rect">
             <a:avLst/>
@@ -5192,7 +5548,7 @@
             <a:r>
               <a:rPr sz="1500" b="0" i="0">
                 <a:solidFill>
-                  <a:srgbClr val="2B2B2B"/>
+                  <a:srgbClr val="26231F"/>
                 </a:solidFill>
               </a:rPr>
               <a:t>입력하세요</a:t>
@@ -5202,24 +5558,24 @@
       </p:sp>
       <p:sp>
         <p:nvSpPr>
-          <p:cNvPr id="12" name="카드 3"/>
+          <p:cNvPr id="16" name="카드 3"/>
           <p:cNvSpPr/>
           <p:nvPr/>
         </p:nvSpPr>
         <p:spPr>
           <a:xfrm>
-            <a:off x="8066836" y="1645920"/>
-            <a:ext cx="3484778" cy="4754880"/>
+            <a:off x="8066836" y="1600200"/>
+            <a:ext cx="3484778" cy="4572000"/>
           </a:xfrm>
           <a:prstGeom prst="roundRect">
             <a:avLst>
-              <a:gd name="adj" fmla="val 8000"/>
+              <a:gd name="adj" fmla="val 3000"/>
             </a:avLst>
           </a:prstGeom>
           <a:solidFill>
-            <a:srgbClr val="EEF8FC"/>
+            <a:srgbClr val="FFFFFF"/>
           </a:solidFill>
-          <a:ln w="15875">
+          <a:ln w="9525">
             <a:solidFill>
               <a:srgbClr val="D1EEFA"/>
             </a:solidFill>
@@ -5235,20 +5591,51 @@
       </p:sp>
       <p:sp>
         <p:nvSpPr>
-          <p:cNvPr id="13" name="번호 3"/>
+          <p:cNvPr id="17" name="위쪽 띠"/>
           <p:cNvSpPr/>
           <p:nvPr/>
         </p:nvSpPr>
         <p:spPr>
           <a:xfrm>
-            <a:off x="8249716" y="1828800"/>
-            <a:ext cx="457200" cy="457200"/>
-          </a:xfrm>
-          <a:prstGeom prst="ellipse">
+            <a:off x="8075980" y="1609344"/>
+            <a:ext cx="3466490" cy="82296"/>
+          </a:xfrm>
+          <a:prstGeom prst="rect">
             <a:avLst/>
           </a:prstGeom>
           <a:solidFill>
-            <a:srgbClr val="2695C5"/>
+            <a:srgbClr val="7BC9EA"/>
+          </a:solidFill>
+          <a:ln>
+            <a:noFill/>
+          </a:ln>
+        </p:spPr>
+        <p:txBody>
+          <a:bodyPr rtlCol="0" anchor="ctr"/>
+          <a:lstStyle/>
+          <a:p>
+            <a:pPr algn="ctr"/>
+          </a:p>
+        </p:txBody>
+      </p:sp>
+      <p:sp>
+        <p:nvSpPr>
+          <p:cNvPr id="18" name="번호 3"/>
+          <p:cNvSpPr/>
+          <p:nvPr/>
+        </p:nvSpPr>
+        <p:spPr>
+          <a:xfrm>
+            <a:off x="8249716" y="1783080"/>
+            <a:ext cx="457200" cy="457200"/>
+          </a:xfrm>
+          <a:prstGeom prst="roundRect">
+            <a:avLst>
+              <a:gd name="adj" fmla="val 25000"/>
+            </a:avLst>
+          </a:prstGeom>
+          <a:solidFill>
+            <a:srgbClr val="7BC9EA"/>
           </a:solidFill>
           <a:ln>
             <a:noFill/>
@@ -5268,7 +5655,7 @@
             <a:r>
               <a:rPr sz="1600" b="1" i="0">
                 <a:solidFill>
-                  <a:srgbClr val="FFFFFF"/>
+                  <a:srgbClr val="26231F"/>
                 </a:solidFill>
               </a:rPr>
               <a:t>3</a:t>
@@ -5278,13 +5665,13 @@
       </p:sp>
       <p:sp>
         <p:nvSpPr>
-          <p:cNvPr id="14" name="TextBox 13"/>
+          <p:cNvPr id="19" name="TextBox 18"/>
           <p:cNvSpPr txBox="1"/>
           <p:nvPr/>
         </p:nvSpPr>
         <p:spPr>
           <a:xfrm>
-            <a:off x="8203996" y="2423160"/>
+            <a:off x="8203996" y="2377440"/>
             <a:ext cx="3210458" cy="640080"/>
           </a:xfrm>
           <a:prstGeom prst="rect">
@@ -5306,7 +5693,7 @@
             <a:r>
               <a:rPr sz="1800" b="1" i="0">
                 <a:solidFill>
-                  <a:srgbClr val="11485F"/>
+                  <a:srgbClr val="273F49"/>
                 </a:solidFill>
               </a:rPr>
               <a:t>기념 촬영</a:t>
@@ -5316,14 +5703,14 @@
       </p:sp>
       <p:sp>
         <p:nvSpPr>
-          <p:cNvPr id="15" name="TextBox 14"/>
+          <p:cNvPr id="20" name="TextBox 19"/>
           <p:cNvSpPr txBox="1"/>
           <p:nvPr/>
         </p:nvSpPr>
         <p:spPr>
           <a:xfrm>
-            <a:off x="8203996" y="3108960"/>
-            <a:ext cx="3210458" cy="3154679"/>
+            <a:off x="8203996" y="3063240"/>
+            <a:ext cx="3210458" cy="2971800"/>
           </a:xfrm>
           <a:prstGeom prst="rect">
             <a:avLst/>
@@ -5344,7 +5731,7 @@
             <a:r>
               <a:rPr sz="1500" b="0" i="0">
                 <a:solidFill>
-                  <a:srgbClr val="2B2B2B"/>
+                  <a:srgbClr val="26231F"/>
                 </a:solidFill>
               </a:rPr>
               <a:t>입력하세요</a:t>
@@ -5386,14 +5773,14 @@
         </p:nvSpPr>
         <p:spPr>
           <a:xfrm>
-            <a:off x="0" y="384048"/>
-            <a:ext cx="9509522" cy="896112"/>
-          </a:xfrm>
-          <a:prstGeom prst="homePlate">
+            <a:off x="640080" y="6400800"/>
+            <a:ext cx="10911535" cy="10972"/>
+          </a:xfrm>
+          <a:prstGeom prst="rect">
             <a:avLst/>
           </a:prstGeom>
           <a:solidFill>
-            <a:srgbClr val="2695C5"/>
+            <a:srgbClr val="26231F"/>
           </a:solidFill>
           <a:ln>
             <a:noFill/>
@@ -5409,6 +5796,73 @@
       </p:sp>
       <p:sp>
         <p:nvSpPr>
+          <p:cNvPr id="4" name="하단 라벨"/>
+          <p:cNvSpPr txBox="1"/>
+          <p:nvPr/>
+        </p:nvSpPr>
+        <p:spPr>
+          <a:xfrm>
+            <a:off x="640080" y="6437376"/>
+            <a:ext cx="5486400" cy="274320"/>
+          </a:xfrm>
+          <a:prstGeom prst="rect">
+            <a:avLst/>
+          </a:prstGeom>
+          <a:noFill/>
+        </p:spPr>
+        <p:txBody>
+          <a:bodyPr wrap="square" lIns="54864" rIns="54864" tIns="27432" bIns="27432" anchor="ctr">
+            <a:noAutofit/>
+          </a:bodyPr>
+          <a:lstStyle/>
+          <a:p>
+            <a:pPr algn="l">
+              <a:lnSpc>
+                <a:spcPct val="115000"/>
+              </a:lnSpc>
+            </a:pPr>
+            <a:r>
+              <a:rPr sz="900" b="1" i="0" spc="250">
+                <a:solidFill>
+                  <a:srgbClr val="26231F"/>
+                </a:solidFill>
+              </a:rPr>
+              <a:t>WEDDING</a:t>
+            </a:r>
+          </a:p>
+        </p:txBody>
+      </p:sp>
+      <p:sp>
+        <p:nvSpPr>
+          <p:cNvPr id="5" name="포인트"/>
+          <p:cNvSpPr/>
+          <p:nvPr/>
+        </p:nvSpPr>
+        <p:spPr>
+          <a:xfrm>
+            <a:off x="11213287" y="6473952"/>
+            <a:ext cx="219456" cy="87782"/>
+          </a:xfrm>
+          <a:prstGeom prst="wave">
+            <a:avLst/>
+          </a:prstGeom>
+          <a:solidFill>
+            <a:srgbClr val="7BC9EA"/>
+          </a:solidFill>
+          <a:ln>
+            <a:noFill/>
+          </a:ln>
+        </p:spPr>
+        <p:txBody>
+          <a:bodyPr rtlCol="0" anchor="ctr"/>
+          <a:lstStyle/>
+          <a:p>
+            <a:pPr algn="ctr"/>
+          </a:p>
+        </p:txBody>
+      </p:sp>
+      <p:sp>
+        <p:nvSpPr>
           <p:cNvPr id="2" name="Title 1"/>
           <p:cNvSpPr>
             <a:spLocks noGrp="1"/>
@@ -5419,8 +5873,8 @@
         </p:nvSpPr>
         <p:spPr>
           <a:xfrm>
-            <a:off x="640080" y="411480"/>
-            <a:ext cx="8412242" cy="822960"/>
+            <a:off x="640080" y="502920"/>
+            <a:ext cx="10911535" cy="914400"/>
           </a:xfrm>
         </p:spPr>
         <p:txBody>
@@ -5437,7 +5891,7 @@
             <a:r>
               <a:rPr sz="3000" b="1" i="0">
                 <a:solidFill>
-                  <a:srgbClr val="FFFFFF"/>
+                  <a:srgbClr val="26231F"/>
                 </a:solidFill>
               </a:rPr>
               <a:t>웨딩 사진</a:t>
@@ -5447,14 +5901,14 @@
       </p:sp>
       <p:sp>
         <p:nvSpPr>
-          <p:cNvPr id="4" name="사진 자리"/>
+          <p:cNvPr id="6" name="사진 자리"/>
           <p:cNvSpPr/>
           <p:nvPr/>
         </p:nvSpPr>
         <p:spPr>
           <a:xfrm>
-            <a:off x="640080" y="1645920"/>
-            <a:ext cx="3515258" cy="2286000"/>
+            <a:off x="640080" y="1600200"/>
+            <a:ext cx="3515258" cy="2194560"/>
           </a:xfrm>
           <a:prstGeom prst="roundRect">
             <a:avLst>
@@ -5465,9 +5919,7 @@
             <a:srgbClr val="D1EEFA"/>
           </a:solidFill>
           <a:ln w="19050">
-            <a:solidFill>
-              <a:srgbClr val="2695C5"/>
-            </a:solidFill>
+            <a:noFill/>
             <a:prstDash val="dash"/>
           </a:ln>
         </p:spPr>
@@ -5485,7 +5937,7 @@
             <a:r>
               <a:rPr sz="1200" b="0" i="0">
                 <a:solidFill>
-                  <a:srgbClr val="11485F"/>
+                  <a:srgbClr val="8E8780"/>
                 </a:solidFill>
               </a:rPr>
               <a:t>사진 1</a:t>
@@ -5495,14 +5947,14 @@
       </p:sp>
       <p:sp>
         <p:nvSpPr>
-          <p:cNvPr id="5" name="사진 자리"/>
+          <p:cNvPr id="7" name="사진 자리"/>
           <p:cNvSpPr/>
           <p:nvPr/>
         </p:nvSpPr>
         <p:spPr>
           <a:xfrm>
-            <a:off x="4338218" y="1645920"/>
-            <a:ext cx="3515258" cy="2286000"/>
+            <a:off x="4338218" y="1600200"/>
+            <a:ext cx="3515258" cy="2194560"/>
           </a:xfrm>
           <a:prstGeom prst="roundRect">
             <a:avLst>
@@ -5513,9 +5965,7 @@
             <a:srgbClr val="D1EEFA"/>
           </a:solidFill>
           <a:ln w="19050">
-            <a:solidFill>
-              <a:srgbClr val="2695C5"/>
-            </a:solidFill>
+            <a:noFill/>
             <a:prstDash val="dash"/>
           </a:ln>
         </p:spPr>
@@ -5533,7 +5983,7 @@
             <a:r>
               <a:rPr sz="1200" b="0" i="0">
                 <a:solidFill>
-                  <a:srgbClr val="11485F"/>
+                  <a:srgbClr val="8E8780"/>
                 </a:solidFill>
               </a:rPr>
               <a:t>사진 2</a:t>
@@ -5543,14 +5993,14 @@
       </p:sp>
       <p:sp>
         <p:nvSpPr>
-          <p:cNvPr id="6" name="사진 자리"/>
+          <p:cNvPr id="8" name="사진 자리"/>
           <p:cNvSpPr/>
           <p:nvPr/>
         </p:nvSpPr>
         <p:spPr>
           <a:xfrm>
-            <a:off x="8036356" y="1645920"/>
-            <a:ext cx="3515258" cy="2286000"/>
+            <a:off x="8036356" y="1600200"/>
+            <a:ext cx="3515258" cy="2194560"/>
           </a:xfrm>
           <a:prstGeom prst="roundRect">
             <a:avLst>
@@ -5561,9 +6011,7 @@
             <a:srgbClr val="D1EEFA"/>
           </a:solidFill>
           <a:ln w="19050">
-            <a:solidFill>
-              <a:srgbClr val="2695C5"/>
-            </a:solidFill>
+            <a:noFill/>
             <a:prstDash val="dash"/>
           </a:ln>
         </p:spPr>
@@ -5581,7 +6029,7 @@
             <a:r>
               <a:rPr sz="1200" b="0" i="0">
                 <a:solidFill>
-                  <a:srgbClr val="11485F"/>
+                  <a:srgbClr val="8E8780"/>
                 </a:solidFill>
               </a:rPr>
               <a:t>사진 3</a:t>
@@ -5591,14 +6039,14 @@
       </p:sp>
       <p:sp>
         <p:nvSpPr>
-          <p:cNvPr id="7" name="사진 자리"/>
+          <p:cNvPr id="9" name="사진 자리"/>
           <p:cNvSpPr/>
           <p:nvPr/>
         </p:nvSpPr>
         <p:spPr>
           <a:xfrm>
-            <a:off x="640080" y="4114800"/>
-            <a:ext cx="3515258" cy="2286000"/>
+            <a:off x="640080" y="3977639"/>
+            <a:ext cx="3515258" cy="2194560"/>
           </a:xfrm>
           <a:prstGeom prst="roundRect">
             <a:avLst>
@@ -5609,9 +6057,7 @@
             <a:srgbClr val="D1EEFA"/>
           </a:solidFill>
           <a:ln w="19050">
-            <a:solidFill>
-              <a:srgbClr val="2695C5"/>
-            </a:solidFill>
+            <a:noFill/>
             <a:prstDash val="dash"/>
           </a:ln>
         </p:spPr>
@@ -5629,7 +6075,7 @@
             <a:r>
               <a:rPr sz="1200" b="0" i="0">
                 <a:solidFill>
-                  <a:srgbClr val="11485F"/>
+                  <a:srgbClr val="8E8780"/>
                 </a:solidFill>
               </a:rPr>
               <a:t>사진 4</a:t>
@@ -5639,14 +6085,14 @@
       </p:sp>
       <p:sp>
         <p:nvSpPr>
-          <p:cNvPr id="8" name="사진 자리"/>
+          <p:cNvPr id="10" name="사진 자리"/>
           <p:cNvSpPr/>
           <p:nvPr/>
         </p:nvSpPr>
         <p:spPr>
           <a:xfrm>
-            <a:off x="4338218" y="4114800"/>
-            <a:ext cx="3515258" cy="2286000"/>
+            <a:off x="4338218" y="3977639"/>
+            <a:ext cx="3515258" cy="2194560"/>
           </a:xfrm>
           <a:prstGeom prst="roundRect">
             <a:avLst>
@@ -5657,9 +6103,7 @@
             <a:srgbClr val="D1EEFA"/>
           </a:solidFill>
           <a:ln w="19050">
-            <a:solidFill>
-              <a:srgbClr val="2695C5"/>
-            </a:solidFill>
+            <a:noFill/>
             <a:prstDash val="dash"/>
           </a:ln>
         </p:spPr>
@@ -5677,7 +6121,7 @@
             <a:r>
               <a:rPr sz="1200" b="0" i="0">
                 <a:solidFill>
-                  <a:srgbClr val="11485F"/>
+                  <a:srgbClr val="8E8780"/>
                 </a:solidFill>
               </a:rPr>
               <a:t>사진 5</a:t>
@@ -5687,14 +6131,14 @@
       </p:sp>
       <p:sp>
         <p:nvSpPr>
-          <p:cNvPr id="9" name="사진 자리"/>
+          <p:cNvPr id="11" name="사진 자리"/>
           <p:cNvSpPr/>
           <p:nvPr/>
         </p:nvSpPr>
         <p:spPr>
           <a:xfrm>
-            <a:off x="8036356" y="4114800"/>
-            <a:ext cx="3515258" cy="2286000"/>
+            <a:off x="8036356" y="3977639"/>
+            <a:ext cx="3515258" cy="2194560"/>
           </a:xfrm>
           <a:prstGeom prst="roundRect">
             <a:avLst>
@@ -5705,9 +6149,7 @@
             <a:srgbClr val="D1EEFA"/>
           </a:solidFill>
           <a:ln w="19050">
-            <a:solidFill>
-              <a:srgbClr val="2695C5"/>
-            </a:solidFill>
+            <a:noFill/>
             <a:prstDash val="dash"/>
           </a:ln>
         </p:spPr>
@@ -5725,7 +6167,7 @@
             <a:r>
               <a:rPr sz="1200" b="0" i="0">
                 <a:solidFill>
-                  <a:srgbClr val="11485F"/>
+                  <a:srgbClr val="8E8780"/>
                 </a:solidFill>
               </a:rPr>
               <a:t>사진 6</a:t>
@@ -5744,6 +6186,14 @@
 <file path=ppt/slides/slide6.xml><?xml version="1.0" encoding="utf-8"?>
 <p:sld xmlns:a="http://schemas.openxmlformats.org/drawingml/2006/main" xmlns:p="http://schemas.openxmlformats.org/presentationml/2006/main" xmlns:r="http://schemas.openxmlformats.org/officeDocument/2006/relationships">
   <p:cSld>
+    <p:bg>
+      <p:bgPr>
+        <a:solidFill>
+          <a:srgbClr val="EAF7FD"/>
+        </a:solidFill>
+        <a:effectLst/>
+      </p:bgPr>
+    </p:bg>
     <p:spTree>
       <p:nvGrpSpPr>
         <p:cNvPr id="1" name=""/>
@@ -5751,30 +6201,119 @@
         <p:nvPr/>
       </p:nvGrpSpPr>
       <p:grpSpPr/>
-      <p:pic>
-        <p:nvPicPr>
-          <p:cNvPr id="3" name="표지 그림" descr="wedding-18.jpg"/>
-          <p:cNvPicPr>
-            <a:picLocks noChangeAspect="1"/>
-          </p:cNvPicPr>
+      <p:sp>
+        <p:nvSpPr>
+          <p:cNvPr id="3" name="사진 자리"/>
+          <p:cNvSpPr/>
           <p:nvPr/>
-        </p:nvPicPr>
-        <p:blipFill>
-          <a:blip r:embed="rId2"/>
-          <a:stretch>
-            <a:fillRect/>
-          </a:stretch>
-        </p:blipFill>
-        <p:spPr>
-          <a:xfrm>
-            <a:off x="0" y="0"/>
-            <a:ext cx="12191695" cy="6858000"/>
+        </p:nvSpPr>
+        <p:spPr>
+          <a:xfrm>
+            <a:off x="1463003" y="685800"/>
+            <a:ext cx="3169840" cy="5486400"/>
+          </a:xfrm>
+          <a:prstGeom prst="round2SameRect">
+            <a:avLst>
+              <a:gd name="adj1" fmla="val 50000"/>
+              <a:gd name="adj2" fmla="val 0"/>
+            </a:avLst>
+          </a:prstGeom>
+          <a:solidFill>
+            <a:srgbClr val="A5DCF3"/>
+          </a:solidFill>
+          <a:ln>
+            <a:noFill/>
+          </a:ln>
+        </p:spPr>
+        <p:txBody>
+          <a:bodyPr rtlCol="0" anchor="ctr" wrap="square" lIns="54864" rIns="54864" tIns="27432" bIns="27432">
+            <a:noAutofit/>
+          </a:bodyPr>
+          <a:lstStyle/>
+          <a:p>
+            <a:pPr algn="ctr">
+              <a:lnSpc>
+                <a:spcPct val="100000"/>
+              </a:lnSpc>
+            </a:pPr>
+            <a:r>
+              <a:rPr sz="1400" b="0" i="0">
+                <a:solidFill>
+                  <a:srgbClr val="273F49"/>
+                </a:solidFill>
+              </a:rPr>
+              <a:t>사진을 넣어 주세요</a:t>
+            </a:r>
+          </a:p>
+        </p:txBody>
+      </p:sp>
+      <p:sp>
+        <p:nvSpPr>
+          <p:cNvPr id="4" name="장식"/>
+          <p:cNvSpPr/>
+          <p:nvPr/>
+        </p:nvSpPr>
+        <p:spPr>
+          <a:xfrm>
+            <a:off x="4358505" y="4251960"/>
+            <a:ext cx="1005840" cy="1005840"/>
+          </a:xfrm>
+          <a:prstGeom prst="ellipse">
+            <a:avLst/>
+          </a:prstGeom>
+          <a:solidFill>
+            <a:srgbClr val="A5DCF3"/>
+          </a:solidFill>
+          <a:ln>
+            <a:noFill/>
+          </a:ln>
+        </p:spPr>
+        <p:txBody>
+          <a:bodyPr rtlCol="0" anchor="ctr"/>
+          <a:lstStyle/>
+          <a:p>
+            <a:pPr algn="ctr"/>
+          </a:p>
+        </p:txBody>
+      </p:sp>
+      <p:sp>
+        <p:nvSpPr>
+          <p:cNvPr id="5" name="라벨"/>
+          <p:cNvSpPr txBox="1"/>
+          <p:nvPr/>
+        </p:nvSpPr>
+        <p:spPr>
+          <a:xfrm>
+            <a:off x="6827349" y="2148840"/>
+            <a:ext cx="4632844" cy="274320"/>
           </a:xfrm>
           <a:prstGeom prst="rect">
             <a:avLst/>
           </a:prstGeom>
-        </p:spPr>
-      </p:pic>
+          <a:noFill/>
+        </p:spPr>
+        <p:txBody>
+          <a:bodyPr wrap="square" lIns="54864" rIns="54864" tIns="27432" bIns="27432" anchor="t">
+            <a:noAutofit/>
+          </a:bodyPr>
+          <a:lstStyle/>
+          <a:p>
+            <a:pPr algn="l">
+              <a:lnSpc>
+                <a:spcPct val="115000"/>
+              </a:lnSpc>
+            </a:pPr>
+            <a:r>
+              <a:rPr sz="1000" b="1" i="0" spc="250">
+                <a:solidFill>
+                  <a:srgbClr val="26231F"/>
+                </a:solidFill>
+              </a:rPr>
+              <a:t>WEDDING</a:t>
+            </a:r>
+          </a:p>
+        </p:txBody>
+      </p:sp>
       <p:sp>
         <p:nvSpPr>
           <p:cNvPr id="2" name="Title 1"/>
@@ -5787,8 +6326,8 @@
         </p:nvSpPr>
         <p:spPr>
           <a:xfrm>
-            <a:off x="853418" y="2057400"/>
-            <a:ext cx="6095847" cy="1554480"/>
+            <a:off x="6827349" y="2606040"/>
+            <a:ext cx="4632844" cy="1188720"/>
           </a:xfrm>
         </p:spPr>
         <p:txBody>
@@ -5805,7 +6344,7 @@
             <a:r>
               <a:rPr sz="3400" b="1" i="0">
                 <a:solidFill>
-                  <a:srgbClr val="11485F"/>
+                  <a:srgbClr val="26231F"/>
                 </a:solidFill>
               </a:rPr>
               <a:t>와 주셔서 고맙습니다</a:t>
@@ -5815,14 +6354,14 @@
       </p:sp>
       <p:sp>
         <p:nvSpPr>
-          <p:cNvPr id="4" name="한 줄 문구"/>
+          <p:cNvPr id="6" name="한 줄 문구"/>
           <p:cNvSpPr txBox="1"/>
           <p:nvPr/>
         </p:nvSpPr>
         <p:spPr>
           <a:xfrm>
-            <a:off x="853418" y="3749039"/>
-            <a:ext cx="6095847" cy="822960"/>
+            <a:off x="6827349" y="3886200"/>
+            <a:ext cx="4632844" cy="822960"/>
           </a:xfrm>
           <a:prstGeom prst="rect">
             <a:avLst/>
@@ -5841,9 +6380,9 @@
               </a:lnSpc>
             </a:pPr>
             <a:r>
-              <a:rPr sz="1700" b="0" i="1">
+              <a:rPr sz="1700" b="0" i="0">
                 <a:solidFill>
-                  <a:srgbClr val="11485F"/>
+                  <a:srgbClr val="26231F"/>
                 </a:solidFill>
               </a:rPr>
               <a:t>잘 살겠습니다</a:t>
@@ -5853,14 +6392,14 @@
       </p:sp>
       <p:sp>
         <p:nvSpPr>
-          <p:cNvPr id="5" name="안내 문구"/>
+          <p:cNvPr id="7" name="안내 문구"/>
           <p:cNvSpPr txBox="1"/>
           <p:nvPr/>
         </p:nvSpPr>
         <p:spPr>
           <a:xfrm>
-            <a:off x="853418" y="4617720"/>
-            <a:ext cx="6095847" cy="914400"/>
+            <a:off x="6827349" y="4754880"/>
+            <a:ext cx="4632844" cy="914400"/>
           </a:xfrm>
           <a:prstGeom prst="rect">
             <a:avLst/>
@@ -5881,7 +6420,7 @@
             <a:r>
               <a:rPr sz="1400" b="0" i="0">
                 <a:solidFill>
-                  <a:srgbClr val="666666"/>
+                  <a:srgbClr val="26231F"/>
                 </a:solidFill>
               </a:rPr>
               <a:t>신랑 이름 ♥ 신부 이름</a:t>
@@ -5908,34 +6447,34 @@
         <a:sysClr val="window" lastClr="FFFFFF"/>
       </a:lt1>
       <a:dk2>
-        <a:srgbClr val="11485F"/>
+        <a:srgbClr val="273F49"/>
       </a:dk2>
       <a:lt2>
-        <a:srgbClr val="EEF8FC"/>
+        <a:srgbClr val="EAF7FD"/>
       </a:lt2>
       <a:accent1>
-        <a:srgbClr val="2695C5"/>
+        <a:srgbClr val="7BC9EA"/>
       </a:accent1>
       <a:accent2>
-        <a:srgbClr val="209DB6"/>
+        <a:srgbClr val="9FB1EF"/>
       </a:accent2>
       <a:accent3>
-        <a:srgbClr val="11485F"/>
+        <a:srgbClr val="273F49"/>
       </a:accent3>
       <a:accent4>
         <a:srgbClr val="D1EEFA"/>
       </a:accent4>
       <a:accent5>
-        <a:srgbClr val="2399BE"/>
+        <a:srgbClr val="8DBDEC"/>
       </a:accent5>
       <a:accent6>
-        <a:srgbClr val="70919F"/>
+        <a:srgbClr val="7D8C92"/>
       </a:accent6>
       <a:hlink>
-        <a:srgbClr val="2695C5"/>
+        <a:srgbClr val="7BC9EA"/>
       </a:hlink>
       <a:folHlink>
-        <a:srgbClr val="11485F"/>
+        <a:srgbClr val="273F49"/>
       </a:folHlink>
     </a:clrScheme>
     <a:fontScheme name="Office">
